--- a/0512_Stablecoins_Presentation.pptx
+++ b/0512_Stablecoins_Presentation.pptx
@@ -4,6 +4,9 @@
   <p:sldMasterIdLst>
     <p:sldMasterId id="2147483648" r:id="rId1"/>
   </p:sldMasterIdLst>
+  <p:notesMasterIdLst>
+    <p:notesMasterId r:id="rId17"/>
+  </p:notesMasterIdLst>
   <p:sldIdLst>
     <p:sldId id="271" r:id="rId2"/>
     <p:sldId id="257" r:id="rId3"/>
@@ -137,6 +140,2032 @@
 </p:presentation>
 </file>
 
+<file path=ppt/notesMasters/notesMaster1.xml><?xml version="1.0" encoding="utf-8"?>
+<p:notesMaster xmlns:a="http://schemas.openxmlformats.org/drawingml/2006/main" xmlns:r="http://schemas.openxmlformats.org/officeDocument/2006/relationships" xmlns:p="http://schemas.openxmlformats.org/presentationml/2006/main">
+  <p:cSld>
+    <p:bg>
+      <p:bgRef idx="1001">
+        <a:schemeClr val="bg1"/>
+      </p:bgRef>
+    </p:bg>
+    <p:spTree>
+      <p:nvGrpSpPr>
+        <p:cNvPr id="1" name=""/>
+        <p:cNvGrpSpPr/>
+        <p:nvPr/>
+      </p:nvGrpSpPr>
+      <p:grpSpPr>
+        <a:xfrm>
+          <a:off x="0" y="0"/>
+          <a:ext cx="0" cy="0"/>
+          <a:chOff x="0" y="0"/>
+          <a:chExt cx="0" cy="0"/>
+        </a:xfrm>
+      </p:grpSpPr>
+      <p:sp>
+        <p:nvSpPr>
+          <p:cNvPr id="2" name="머리글 개체 틀 1"/>
+          <p:cNvSpPr>
+            <a:spLocks noGrp="1"/>
+          </p:cNvSpPr>
+          <p:nvPr>
+            <p:ph type="hdr" sz="quarter"/>
+          </p:nvPr>
+        </p:nvSpPr>
+        <p:spPr>
+          <a:xfrm>
+            <a:off x="0" y="0"/>
+            <a:ext cx="2971800" cy="458788"/>
+          </a:xfrm>
+          <a:prstGeom prst="rect">
+            <a:avLst/>
+          </a:prstGeom>
+        </p:spPr>
+        <p:txBody>
+          <a:bodyPr vert="horz" lIns="91440" tIns="45720" rIns="91440" bIns="45720" rtlCol="0"/>
+          <a:lstStyle>
+            <a:lvl1pPr algn="l">
+              <a:defRPr sz="1200"/>
+            </a:lvl1pPr>
+          </a:lstStyle>
+          <a:p>
+            <a:endParaRPr kumimoji="1" lang="ko-KR" altLang="en-US"/>
+          </a:p>
+        </p:txBody>
+      </p:sp>
+      <p:sp>
+        <p:nvSpPr>
+          <p:cNvPr id="3" name="날짜 개체 틀 2"/>
+          <p:cNvSpPr>
+            <a:spLocks noGrp="1"/>
+          </p:cNvSpPr>
+          <p:nvPr>
+            <p:ph type="dt" idx="1"/>
+          </p:nvPr>
+        </p:nvSpPr>
+        <p:spPr>
+          <a:xfrm>
+            <a:off x="3884613" y="0"/>
+            <a:ext cx="2971800" cy="458788"/>
+          </a:xfrm>
+          <a:prstGeom prst="rect">
+            <a:avLst/>
+          </a:prstGeom>
+        </p:spPr>
+        <p:txBody>
+          <a:bodyPr vert="horz" lIns="91440" tIns="45720" rIns="91440" bIns="45720" rtlCol="0"/>
+          <a:lstStyle>
+            <a:lvl1pPr algn="r">
+              <a:defRPr sz="1200"/>
+            </a:lvl1pPr>
+          </a:lstStyle>
+          <a:p>
+            <a:fld id="{BCA343BF-B7C7-1D48-A9E8-A573FC36AA7C}" type="datetimeFigureOut">
+              <a:rPr kumimoji="1" lang="ko-KR" altLang="en-US" smtClean="0"/>
+              <a:t>2026. 5. 7.</a:t>
+            </a:fld>
+            <a:endParaRPr kumimoji="1" lang="ko-KR" altLang="en-US"/>
+          </a:p>
+        </p:txBody>
+      </p:sp>
+      <p:sp>
+        <p:nvSpPr>
+          <p:cNvPr id="4" name="슬라이드 이미지 개체 틀 3"/>
+          <p:cNvSpPr>
+            <a:spLocks noGrp="1" noRot="1" noChangeAspect="1"/>
+          </p:cNvSpPr>
+          <p:nvPr>
+            <p:ph type="sldImg" idx="2"/>
+          </p:nvPr>
+        </p:nvSpPr>
+        <p:spPr>
+          <a:xfrm>
+            <a:off x="685800" y="1143000"/>
+            <a:ext cx="5486400" cy="3086100"/>
+          </a:xfrm>
+          <a:prstGeom prst="rect">
+            <a:avLst/>
+          </a:prstGeom>
+          <a:noFill/>
+          <a:ln w="12700">
+            <a:solidFill>
+              <a:prstClr val="black"/>
+            </a:solidFill>
+          </a:ln>
+        </p:spPr>
+        <p:txBody>
+          <a:bodyPr vert="horz" lIns="91440" tIns="45720" rIns="91440" bIns="45720" rtlCol="0" anchor="ctr"/>
+          <a:lstStyle/>
+          <a:p>
+            <a:endParaRPr lang="ko-KR" altLang="en-US"/>
+          </a:p>
+        </p:txBody>
+      </p:sp>
+      <p:sp>
+        <p:nvSpPr>
+          <p:cNvPr id="5" name="슬라이드 노트 개체 틀 4"/>
+          <p:cNvSpPr>
+            <a:spLocks noGrp="1"/>
+          </p:cNvSpPr>
+          <p:nvPr>
+            <p:ph type="body" sz="quarter" idx="3"/>
+          </p:nvPr>
+        </p:nvSpPr>
+        <p:spPr>
+          <a:xfrm>
+            <a:off x="685800" y="4400550"/>
+            <a:ext cx="5486400" cy="3600450"/>
+          </a:xfrm>
+          <a:prstGeom prst="rect">
+            <a:avLst/>
+          </a:prstGeom>
+        </p:spPr>
+        <p:txBody>
+          <a:bodyPr vert="horz" lIns="91440" tIns="45720" rIns="91440" bIns="45720" rtlCol="0"/>
+          <a:lstStyle/>
+          <a:p>
+            <a:pPr lvl="0"/>
+            <a:r>
+              <a:rPr kumimoji="1" lang="ko-KR" altLang="en-US"/>
+              <a:t>마스터 텍스트 스타일을 편집하려면 클릭</a:t>
+            </a:r>
+          </a:p>
+          <a:p>
+            <a:pPr lvl="1"/>
+            <a:r>
+              <a:rPr kumimoji="1" lang="ko-KR" altLang="en-US"/>
+              <a:t>두 번째 수준</a:t>
+            </a:r>
+          </a:p>
+          <a:p>
+            <a:pPr lvl="2"/>
+            <a:r>
+              <a:rPr kumimoji="1" lang="ko-KR" altLang="en-US"/>
+              <a:t>세 번째 수준</a:t>
+            </a:r>
+          </a:p>
+          <a:p>
+            <a:pPr lvl="3"/>
+            <a:r>
+              <a:rPr kumimoji="1" lang="ko-KR" altLang="en-US"/>
+              <a:t>네 번째 수준</a:t>
+            </a:r>
+          </a:p>
+          <a:p>
+            <a:pPr lvl="4"/>
+            <a:r>
+              <a:rPr kumimoji="1" lang="ko-KR" altLang="en-US"/>
+              <a:t>다섯 번째 수준</a:t>
+            </a:r>
+          </a:p>
+        </p:txBody>
+      </p:sp>
+      <p:sp>
+        <p:nvSpPr>
+          <p:cNvPr id="6" name="바닥글 개체 틀 5"/>
+          <p:cNvSpPr>
+            <a:spLocks noGrp="1"/>
+          </p:cNvSpPr>
+          <p:nvPr>
+            <p:ph type="ftr" sz="quarter" idx="4"/>
+          </p:nvPr>
+        </p:nvSpPr>
+        <p:spPr>
+          <a:xfrm>
+            <a:off x="0" y="8685213"/>
+            <a:ext cx="2971800" cy="458787"/>
+          </a:xfrm>
+          <a:prstGeom prst="rect">
+            <a:avLst/>
+          </a:prstGeom>
+        </p:spPr>
+        <p:txBody>
+          <a:bodyPr vert="horz" lIns="91440" tIns="45720" rIns="91440" bIns="45720" rtlCol="0" anchor="b"/>
+          <a:lstStyle>
+            <a:lvl1pPr algn="l">
+              <a:defRPr sz="1200"/>
+            </a:lvl1pPr>
+          </a:lstStyle>
+          <a:p>
+            <a:endParaRPr kumimoji="1" lang="ko-KR" altLang="en-US"/>
+          </a:p>
+        </p:txBody>
+      </p:sp>
+      <p:sp>
+        <p:nvSpPr>
+          <p:cNvPr id="7" name="슬라이드 번호 개체 틀 6"/>
+          <p:cNvSpPr>
+            <a:spLocks noGrp="1"/>
+          </p:cNvSpPr>
+          <p:nvPr>
+            <p:ph type="sldNum" sz="quarter" idx="5"/>
+          </p:nvPr>
+        </p:nvSpPr>
+        <p:spPr>
+          <a:xfrm>
+            <a:off x="3884613" y="8685213"/>
+            <a:ext cx="2971800" cy="458787"/>
+          </a:xfrm>
+          <a:prstGeom prst="rect">
+            <a:avLst/>
+          </a:prstGeom>
+        </p:spPr>
+        <p:txBody>
+          <a:bodyPr vert="horz" lIns="91440" tIns="45720" rIns="91440" bIns="45720" rtlCol="0" anchor="b"/>
+          <a:lstStyle>
+            <a:lvl1pPr algn="r">
+              <a:defRPr sz="1200"/>
+            </a:lvl1pPr>
+          </a:lstStyle>
+          <a:p>
+            <a:fld id="{5D514313-3BDE-834F-BE4B-14A4F858B1F2}" type="slidenum">
+              <a:rPr kumimoji="1" lang="ko-KR" altLang="en-US" smtClean="0"/>
+              <a:t>‹#›</a:t>
+            </a:fld>
+            <a:endParaRPr kumimoji="1" lang="ko-KR" altLang="en-US"/>
+          </a:p>
+        </p:txBody>
+      </p:sp>
+    </p:spTree>
+    <p:extLst>
+      <p:ext uri="{BB962C8B-B14F-4D97-AF65-F5344CB8AC3E}">
+        <p14:creationId xmlns:p14="http://schemas.microsoft.com/office/powerpoint/2010/main" val="1437435658"/>
+      </p:ext>
+    </p:extLst>
+  </p:cSld>
+  <p:clrMap bg1="lt1" tx1="dk1" bg2="lt2" tx2="dk2" accent1="accent1" accent2="accent2" accent3="accent3" accent4="accent4" accent5="accent5" accent6="accent6" hlink="hlink" folHlink="folHlink"/>
+  <p:notesStyle>
+    <a:lvl1pPr marL="0" algn="l" defTabSz="914400" rtl="0" eaLnBrk="1" latinLnBrk="1" hangingPunct="1">
+      <a:defRPr sz="1200" kern="1200">
+        <a:solidFill>
+          <a:schemeClr val="tx1"/>
+        </a:solidFill>
+        <a:latin typeface="+mn-lt"/>
+        <a:ea typeface="+mn-ea"/>
+        <a:cs typeface="+mn-cs"/>
+      </a:defRPr>
+    </a:lvl1pPr>
+    <a:lvl2pPr marL="457200" algn="l" defTabSz="914400" rtl="0" eaLnBrk="1" latinLnBrk="1" hangingPunct="1">
+      <a:defRPr sz="1200" kern="1200">
+        <a:solidFill>
+          <a:schemeClr val="tx1"/>
+        </a:solidFill>
+        <a:latin typeface="+mn-lt"/>
+        <a:ea typeface="+mn-ea"/>
+        <a:cs typeface="+mn-cs"/>
+      </a:defRPr>
+    </a:lvl2pPr>
+    <a:lvl3pPr marL="914400" algn="l" defTabSz="914400" rtl="0" eaLnBrk="1" latinLnBrk="1" hangingPunct="1">
+      <a:defRPr sz="1200" kern="1200">
+        <a:solidFill>
+          <a:schemeClr val="tx1"/>
+        </a:solidFill>
+        <a:latin typeface="+mn-lt"/>
+        <a:ea typeface="+mn-ea"/>
+        <a:cs typeface="+mn-cs"/>
+      </a:defRPr>
+    </a:lvl3pPr>
+    <a:lvl4pPr marL="1371600" algn="l" defTabSz="914400" rtl="0" eaLnBrk="1" latinLnBrk="1" hangingPunct="1">
+      <a:defRPr sz="1200" kern="1200">
+        <a:solidFill>
+          <a:schemeClr val="tx1"/>
+        </a:solidFill>
+        <a:latin typeface="+mn-lt"/>
+        <a:ea typeface="+mn-ea"/>
+        <a:cs typeface="+mn-cs"/>
+      </a:defRPr>
+    </a:lvl4pPr>
+    <a:lvl5pPr marL="1828800" algn="l" defTabSz="914400" rtl="0" eaLnBrk="1" latinLnBrk="1" hangingPunct="1">
+      <a:defRPr sz="1200" kern="1200">
+        <a:solidFill>
+          <a:schemeClr val="tx1"/>
+        </a:solidFill>
+        <a:latin typeface="+mn-lt"/>
+        <a:ea typeface="+mn-ea"/>
+        <a:cs typeface="+mn-cs"/>
+      </a:defRPr>
+    </a:lvl5pPr>
+    <a:lvl6pPr marL="2286000" algn="l" defTabSz="914400" rtl="0" eaLnBrk="1" latinLnBrk="1" hangingPunct="1">
+      <a:defRPr sz="1200" kern="1200">
+        <a:solidFill>
+          <a:schemeClr val="tx1"/>
+        </a:solidFill>
+        <a:latin typeface="+mn-lt"/>
+        <a:ea typeface="+mn-ea"/>
+        <a:cs typeface="+mn-cs"/>
+      </a:defRPr>
+    </a:lvl6pPr>
+    <a:lvl7pPr marL="2743200" algn="l" defTabSz="914400" rtl="0" eaLnBrk="1" latinLnBrk="1" hangingPunct="1">
+      <a:defRPr sz="1200" kern="1200">
+        <a:solidFill>
+          <a:schemeClr val="tx1"/>
+        </a:solidFill>
+        <a:latin typeface="+mn-lt"/>
+        <a:ea typeface="+mn-ea"/>
+        <a:cs typeface="+mn-cs"/>
+      </a:defRPr>
+    </a:lvl7pPr>
+    <a:lvl8pPr marL="3200400" algn="l" defTabSz="914400" rtl="0" eaLnBrk="1" latinLnBrk="1" hangingPunct="1">
+      <a:defRPr sz="1200" kern="1200">
+        <a:solidFill>
+          <a:schemeClr val="tx1"/>
+        </a:solidFill>
+        <a:latin typeface="+mn-lt"/>
+        <a:ea typeface="+mn-ea"/>
+        <a:cs typeface="+mn-cs"/>
+      </a:defRPr>
+    </a:lvl8pPr>
+    <a:lvl9pPr marL="3657600" algn="l" defTabSz="914400" rtl="0" eaLnBrk="1" latinLnBrk="1" hangingPunct="1">
+      <a:defRPr sz="1200" kern="1200">
+        <a:solidFill>
+          <a:schemeClr val="tx1"/>
+        </a:solidFill>
+        <a:latin typeface="+mn-lt"/>
+        <a:ea typeface="+mn-ea"/>
+        <a:cs typeface="+mn-cs"/>
+      </a:defRPr>
+    </a:lvl9pPr>
+  </p:notesStyle>
+</p:notesMaster>
+</file>
+
+<file path=ppt/notesSlides/notesSlide1.xml><?xml version="1.0" encoding="utf-8"?>
+<p:notes xmlns:a="http://schemas.openxmlformats.org/drawingml/2006/main" xmlns:r="http://schemas.openxmlformats.org/officeDocument/2006/relationships" xmlns:p="http://schemas.openxmlformats.org/presentationml/2006/main">
+  <p:cSld>
+    <p:spTree>
+      <p:nvGrpSpPr>
+        <p:cNvPr id="1" name=""/>
+        <p:cNvGrpSpPr/>
+        <p:nvPr/>
+      </p:nvGrpSpPr>
+      <p:grpSpPr>
+        <a:xfrm>
+          <a:off x="0" y="0"/>
+          <a:ext cx="0" cy="0"/>
+          <a:chOff x="0" y="0"/>
+          <a:chExt cx="0" cy="0"/>
+        </a:xfrm>
+      </p:grpSpPr>
+      <p:sp>
+        <p:nvSpPr>
+          <p:cNvPr id="2" name="슬라이드 이미지 개체 틀 1"/>
+          <p:cNvSpPr>
+            <a:spLocks noGrp="1" noRot="1" noChangeAspect="1"/>
+          </p:cNvSpPr>
+          <p:nvPr>
+            <p:ph type="sldImg"/>
+          </p:nvPr>
+        </p:nvSpPr>
+        <p:spPr/>
+      </p:sp>
+      <p:sp>
+        <p:nvSpPr>
+          <p:cNvPr id="3" name="슬라이드 노트 개체 틀 2"/>
+          <p:cNvSpPr>
+            <a:spLocks noGrp="1"/>
+          </p:cNvSpPr>
+          <p:nvPr>
+            <p:ph type="body" idx="1"/>
+          </p:nvPr>
+        </p:nvSpPr>
+        <p:spPr/>
+        <p:txBody>
+          <a:bodyPr/>
+          <a:lstStyle/>
+          <a:p>
+            <a:r>
+              <a:rPr lang="en-US" altLang="ko-KR" dirty="0"/>
+              <a:t>"Good [morning/afternoon] everyone. Our paper is called 'Stablecoins and the Exorbitant Privilege.' We're a team of three — Mireu, Sara, and Oybek. The core question we're trying to answer is deceptively simple: does the explosion in stablecoins like Tether and USDC actually make it cheaper for the US to borrow money, and what happens to that benefit when things go wrong? That two-sided puzzle is what this paper is about."</a:t>
+            </a:r>
+            <a:endParaRPr kumimoji="1" lang="ko-KR" altLang="en-US" dirty="0"/>
+          </a:p>
+        </p:txBody>
+      </p:sp>
+      <p:sp>
+        <p:nvSpPr>
+          <p:cNvPr id="4" name="슬라이드 번호 개체 틀 3"/>
+          <p:cNvSpPr>
+            <a:spLocks noGrp="1"/>
+          </p:cNvSpPr>
+          <p:nvPr>
+            <p:ph type="sldNum" sz="quarter" idx="5"/>
+          </p:nvPr>
+        </p:nvSpPr>
+        <p:spPr/>
+        <p:txBody>
+          <a:bodyPr/>
+          <a:lstStyle/>
+          <a:p>
+            <a:fld id="{5D514313-3BDE-834F-BE4B-14A4F858B1F2}" type="slidenum">
+              <a:rPr kumimoji="1" lang="ko-KR" altLang="en-US" smtClean="0"/>
+              <a:t>1</a:t>
+            </a:fld>
+            <a:endParaRPr kumimoji="1" lang="ko-KR" altLang="en-US"/>
+          </a:p>
+        </p:txBody>
+      </p:sp>
+    </p:spTree>
+    <p:extLst>
+      <p:ext uri="{BB962C8B-B14F-4D97-AF65-F5344CB8AC3E}">
+        <p14:creationId xmlns:p14="http://schemas.microsoft.com/office/powerpoint/2010/main" val="2673642059"/>
+      </p:ext>
+    </p:extLst>
+  </p:cSld>
+  <p:clrMapOvr>
+    <a:masterClrMapping/>
+  </p:clrMapOvr>
+</p:notes>
+</file>
+
+<file path=ppt/notesSlides/notesSlide10.xml><?xml version="1.0" encoding="utf-8"?>
+<p:notes xmlns:a="http://schemas.openxmlformats.org/drawingml/2006/main" xmlns:r="http://schemas.openxmlformats.org/officeDocument/2006/relationships" xmlns:p="http://schemas.openxmlformats.org/presentationml/2006/main">
+  <p:cSld>
+    <p:spTree>
+      <p:nvGrpSpPr>
+        <p:cNvPr id="1" name=""/>
+        <p:cNvGrpSpPr/>
+        <p:nvPr/>
+      </p:nvGrpSpPr>
+      <p:grpSpPr>
+        <a:xfrm>
+          <a:off x="0" y="0"/>
+          <a:ext cx="0" cy="0"/>
+          <a:chOff x="0" y="0"/>
+          <a:chExt cx="0" cy="0"/>
+        </a:xfrm>
+      </p:grpSpPr>
+      <p:sp>
+        <p:nvSpPr>
+          <p:cNvPr id="2" name="슬라이드 이미지 개체 틀 1"/>
+          <p:cNvSpPr>
+            <a:spLocks noGrp="1" noRot="1" noChangeAspect="1"/>
+          </p:cNvSpPr>
+          <p:nvPr>
+            <p:ph type="sldImg"/>
+          </p:nvPr>
+        </p:nvSpPr>
+        <p:spPr/>
+      </p:sp>
+      <p:sp>
+        <p:nvSpPr>
+          <p:cNvPr id="3" name="슬라이드 노트 개체 틀 2"/>
+          <p:cNvSpPr>
+            <a:spLocks noGrp="1"/>
+          </p:cNvSpPr>
+          <p:nvPr>
+            <p:ph type="body" idx="1"/>
+          </p:nvPr>
+        </p:nvSpPr>
+        <p:spPr/>
+        <p:txBody>
+          <a:bodyPr/>
+          <a:lstStyle/>
+          <a:p>
+            <a:r>
+              <a:rPr lang="en-US" altLang="ko-KR" dirty="0"/>
+              <a:t>"Our third result is the event study, and this is arguably our cleanest evidence because it sidesteps the statistical issues with monthly time-series data by using daily data around specific, identified crisis episodes.</a:t>
+            </a:r>
+          </a:p>
+          <a:p>
+            <a:r>
+              <a:rPr lang="en-US" altLang="ko-KR" dirty="0"/>
+              <a:t>We looked at three events. The first two — LUNA's collapse on May 9th 2022, and the USDT partial </a:t>
+            </a:r>
+            <a:r>
+              <a:rPr lang="en-US" altLang="ko-KR" dirty="0" err="1"/>
+              <a:t>depeg</a:t>
+            </a:r>
+            <a:r>
+              <a:rPr lang="en-US" altLang="ko-KR" dirty="0"/>
+              <a:t> three days later on May 12th — both happened when the aggregate reserve buffer was deeply below the crisis zone threshold. Low-buffer events. The third — USDC's </a:t>
+            </a:r>
+            <a:r>
+              <a:rPr lang="en-US" altLang="ko-KR" dirty="0" err="1"/>
+              <a:t>depeg</a:t>
+            </a:r>
+            <a:r>
+              <a:rPr lang="en-US" altLang="ko-KR" dirty="0"/>
+              <a:t> when Silicon Valley Bank failed on March 11th 2023 — was a higher-buffer event, because Circle held mostly Treasuries.</a:t>
+            </a:r>
+          </a:p>
+          <a:p>
+            <a:r>
+              <a:rPr lang="en-US" altLang="ko-KR" dirty="0"/>
+              <a:t>Look at the three charts in the middle. The red lines are the low-buffer events. You can see the cumulative abnormal spread — how much the spread moved relative to what we'd expect based on VIX and global equity returns — climbing steadily upward over 20 trading days. That's plus 8.91 percentage points for LUNA and plus 8.85 for USDT. Both are highly statistically significant. This is the Cole-Kehoe mechanism playing out in real time: forced Treasury liquidation by under-reserved issuers pushed yields up and widened the sovereign spread.</a:t>
+            </a:r>
+          </a:p>
+          <a:p>
+            <a:r>
+              <a:rPr lang="en-US" altLang="ko-KR" dirty="0"/>
+              <a:t>Now look at the blue line for USDC and SVB. It goes sharply negative — minus 18 percentage points. This looks counterintuitive at first. SVB failed, why did spreads compress? Because Circle held its reserves mostly in Treasuries. When SVB panic hit, investors fled into the safest possible asset — US T-bills. And because USDC's reserve structure directed that flight into Treasuries, spreads compressed rather than widened.</a:t>
+            </a:r>
+          </a:p>
+          <a:p>
+            <a:r>
+              <a:rPr lang="en-US" altLang="ko-KR" dirty="0"/>
+              <a:t>The Welch test at the bottom of the interpretation box — comparing the distribution of daily abnormal spreads across the two buffer regimes — gives a t-statistic of 15.22, p below 0.001. The buffer is not just a detail. It is the variable that determines whether a stablecoin crisis helps or hurts the sovereign bond market."</a:t>
+            </a:r>
+          </a:p>
+          <a:p>
+            <a:endParaRPr kumimoji="1" lang="ko-KR" altLang="en-US" dirty="0"/>
+          </a:p>
+        </p:txBody>
+      </p:sp>
+      <p:sp>
+        <p:nvSpPr>
+          <p:cNvPr id="4" name="슬라이드 번호 개체 틀 3"/>
+          <p:cNvSpPr>
+            <a:spLocks noGrp="1"/>
+          </p:cNvSpPr>
+          <p:nvPr>
+            <p:ph type="sldNum" sz="quarter" idx="5"/>
+          </p:nvPr>
+        </p:nvSpPr>
+        <p:spPr/>
+        <p:txBody>
+          <a:bodyPr/>
+          <a:lstStyle/>
+          <a:p>
+            <a:fld id="{5D514313-3BDE-834F-BE4B-14A4F858B1F2}" type="slidenum">
+              <a:rPr kumimoji="1" lang="ko-KR" altLang="en-US" smtClean="0"/>
+              <a:t>10</a:t>
+            </a:fld>
+            <a:endParaRPr kumimoji="1" lang="ko-KR" altLang="en-US"/>
+          </a:p>
+        </p:txBody>
+      </p:sp>
+    </p:spTree>
+    <p:extLst>
+      <p:ext uri="{BB962C8B-B14F-4D97-AF65-F5344CB8AC3E}">
+        <p14:creationId xmlns:p14="http://schemas.microsoft.com/office/powerpoint/2010/main" val="910069944"/>
+      </p:ext>
+    </p:extLst>
+  </p:cSld>
+  <p:clrMapOvr>
+    <a:masterClrMapping/>
+  </p:clrMapOvr>
+</p:notes>
+</file>
+
+<file path=ppt/notesSlides/notesSlide11.xml><?xml version="1.0" encoding="utf-8"?>
+<p:notes xmlns:a="http://schemas.openxmlformats.org/drawingml/2006/main" xmlns:r="http://schemas.openxmlformats.org/officeDocument/2006/relationships" xmlns:p="http://schemas.openxmlformats.org/presentationml/2006/main">
+  <p:cSld>
+    <p:spTree>
+      <p:nvGrpSpPr>
+        <p:cNvPr id="1" name=""/>
+        <p:cNvGrpSpPr/>
+        <p:nvPr/>
+      </p:nvGrpSpPr>
+      <p:grpSpPr>
+        <a:xfrm>
+          <a:off x="0" y="0"/>
+          <a:ext cx="0" cy="0"/>
+          <a:chOff x="0" y="0"/>
+          <a:chExt cx="0" cy="0"/>
+        </a:xfrm>
+      </p:grpSpPr>
+      <p:sp>
+        <p:nvSpPr>
+          <p:cNvPr id="2" name="슬라이드 이미지 개체 틀 1"/>
+          <p:cNvSpPr>
+            <a:spLocks noGrp="1" noRot="1" noChangeAspect="1"/>
+          </p:cNvSpPr>
+          <p:nvPr>
+            <p:ph type="sldImg"/>
+          </p:nvPr>
+        </p:nvSpPr>
+        <p:spPr/>
+      </p:sp>
+      <p:sp>
+        <p:nvSpPr>
+          <p:cNvPr id="3" name="슬라이드 노트 개체 틀 2"/>
+          <p:cNvSpPr>
+            <a:spLocks noGrp="1"/>
+          </p:cNvSpPr>
+          <p:nvPr>
+            <p:ph type="body" idx="1"/>
+          </p:nvPr>
+        </p:nvSpPr>
+        <p:spPr/>
+        <p:txBody>
+          <a:bodyPr/>
+          <a:lstStyle/>
+          <a:p>
+            <a:r>
+              <a:rPr lang="en-US" altLang="ko-KR" dirty="0"/>
+              <a:t>"Before we move to conclusions, here are our robustness checks — all four in one slide.</a:t>
+            </a:r>
+          </a:p>
+          <a:p>
+            <a:r>
+              <a:rPr lang="en-US" altLang="ko-KR" dirty="0"/>
+              <a:t>NW lag sensitivity: we tried different numbers of lags in the Newey-West correction. Beta-one and beta-three stay at minus 5.95 and minus 11.30 throughout. Pass.</a:t>
+            </a:r>
+          </a:p>
+          <a:p>
+            <a:r>
+              <a:rPr lang="en-US" altLang="ko-KR" dirty="0"/>
+              <a:t>Drop pre-attestation period: we dropped the 14 months before Tether's first attestation, where our buffer variable was estimated rather than observed. The coefficients actually got stronger. Pass.</a:t>
+            </a:r>
+          </a:p>
+          <a:p>
+            <a:r>
+              <a:rPr lang="en-US" altLang="ko-KR" dirty="0"/>
+              <a:t>Mean-centering: we centered the variables before computing the interaction term to reduce multicollinearity. VIF dropped from 24 and 32 down to 5.7 and 7.2. Results unchanged. Pass.</a:t>
+            </a:r>
+          </a:p>
+          <a:p>
+            <a:r>
+              <a:rPr lang="en-US" altLang="ko-KR" dirty="0"/>
+              <a:t>First-differenced: this is the honest caveat. When we first-difference all the variables to deal with potential non-stationarity, beta-one and beta-three lose significance. This tells us our level regression is capturing a slow-moving structural relationship — how stablecoins have gradually changed the market structure for Treasuries over years — rather than month-to-month causality. That's why the event study, which uses daily data around clean quasi-experimental shocks, is our primary causal identification."</a:t>
+            </a:r>
+          </a:p>
+          <a:p>
+            <a:endParaRPr kumimoji="1" lang="ko-KR" altLang="en-US" dirty="0"/>
+          </a:p>
+        </p:txBody>
+      </p:sp>
+      <p:sp>
+        <p:nvSpPr>
+          <p:cNvPr id="4" name="슬라이드 번호 개체 틀 3"/>
+          <p:cNvSpPr>
+            <a:spLocks noGrp="1"/>
+          </p:cNvSpPr>
+          <p:nvPr>
+            <p:ph type="sldNum" sz="quarter" idx="5"/>
+          </p:nvPr>
+        </p:nvSpPr>
+        <p:spPr/>
+        <p:txBody>
+          <a:bodyPr/>
+          <a:lstStyle/>
+          <a:p>
+            <a:fld id="{5D514313-3BDE-834F-BE4B-14A4F858B1F2}" type="slidenum">
+              <a:rPr kumimoji="1" lang="ko-KR" altLang="en-US" smtClean="0"/>
+              <a:t>11</a:t>
+            </a:fld>
+            <a:endParaRPr kumimoji="1" lang="ko-KR" altLang="en-US"/>
+          </a:p>
+        </p:txBody>
+      </p:sp>
+    </p:spTree>
+    <p:extLst>
+      <p:ext uri="{BB962C8B-B14F-4D97-AF65-F5344CB8AC3E}">
+        <p14:creationId xmlns:p14="http://schemas.microsoft.com/office/powerpoint/2010/main" val="2685720169"/>
+      </p:ext>
+    </p:extLst>
+  </p:cSld>
+  <p:clrMapOvr>
+    <a:masterClrMapping/>
+  </p:clrMapOvr>
+</p:notes>
+</file>
+
+<file path=ppt/notesSlides/notesSlide12.xml><?xml version="1.0" encoding="utf-8"?>
+<p:notes xmlns:a="http://schemas.openxmlformats.org/drawingml/2006/main" xmlns:r="http://schemas.openxmlformats.org/officeDocument/2006/relationships" xmlns:p="http://schemas.openxmlformats.org/presentationml/2006/main">
+  <p:cSld>
+    <p:spTree>
+      <p:nvGrpSpPr>
+        <p:cNvPr id="1" name=""/>
+        <p:cNvGrpSpPr/>
+        <p:nvPr/>
+      </p:nvGrpSpPr>
+      <p:grpSpPr>
+        <a:xfrm>
+          <a:off x="0" y="0"/>
+          <a:ext cx="0" cy="0"/>
+          <a:chOff x="0" y="0"/>
+          <a:chExt cx="0" cy="0"/>
+        </a:xfrm>
+      </p:grpSpPr>
+      <p:sp>
+        <p:nvSpPr>
+          <p:cNvPr id="2" name="슬라이드 이미지 개체 틀 1"/>
+          <p:cNvSpPr>
+            <a:spLocks noGrp="1" noRot="1" noChangeAspect="1"/>
+          </p:cNvSpPr>
+          <p:nvPr>
+            <p:ph type="sldImg"/>
+          </p:nvPr>
+        </p:nvSpPr>
+        <p:spPr/>
+      </p:sp>
+      <p:sp>
+        <p:nvSpPr>
+          <p:cNvPr id="3" name="슬라이드 노트 개체 틀 2"/>
+          <p:cNvSpPr>
+            <a:spLocks noGrp="1"/>
+          </p:cNvSpPr>
+          <p:nvPr>
+            <p:ph type="body" idx="1"/>
+          </p:nvPr>
+        </p:nvSpPr>
+        <p:spPr/>
+        <p:txBody>
+          <a:bodyPr/>
+          <a:lstStyle/>
+          <a:p>
+            <a:r>
+              <a:rPr lang="en-US" altLang="ko-KR" dirty="0"/>
+              <a:t>"Quick summary of what we found. Four checkmarks and one honest caveat.</a:t>
+            </a:r>
+          </a:p>
+          <a:p>
+            <a:r>
+              <a:rPr lang="en-US" altLang="ko-KR" dirty="0"/>
+              <a:t>First: privilege amplification confirmed — beta-one equals minus 5.95. Second: the buffer interaction is significant — beta-three equals minus 11.30, confirming that low reserves reverse the amplification. Third: we identified a statistically significant reserve adequacy threshold at q-star equals minus 0.524 — Treasury holdings must exceed 47.6% of supply to stay outside the crisis zone. Fourth: the event study confirms the asymmetry — a 27 percentage point swing in spread behavior between low- and high-buffer stress episodes.</a:t>
+            </a:r>
+          </a:p>
+          <a:p>
+            <a:r>
+              <a:rPr lang="en-US" altLang="ko-KR" dirty="0"/>
+              <a:t>And the caveat: level results don't survive first-differencing. The event study provides the causal identification."</a:t>
+            </a:r>
+          </a:p>
+          <a:p>
+            <a:endParaRPr kumimoji="1" lang="ko-KR" altLang="en-US" dirty="0"/>
+          </a:p>
+        </p:txBody>
+      </p:sp>
+      <p:sp>
+        <p:nvSpPr>
+          <p:cNvPr id="4" name="슬라이드 번호 개체 틀 3"/>
+          <p:cNvSpPr>
+            <a:spLocks noGrp="1"/>
+          </p:cNvSpPr>
+          <p:nvPr>
+            <p:ph type="sldNum" sz="quarter" idx="5"/>
+          </p:nvPr>
+        </p:nvSpPr>
+        <p:spPr/>
+        <p:txBody>
+          <a:bodyPr/>
+          <a:lstStyle/>
+          <a:p>
+            <a:fld id="{5D514313-3BDE-834F-BE4B-14A4F858B1F2}" type="slidenum">
+              <a:rPr kumimoji="1" lang="ko-KR" altLang="en-US" smtClean="0"/>
+              <a:t>12</a:t>
+            </a:fld>
+            <a:endParaRPr kumimoji="1" lang="ko-KR" altLang="en-US"/>
+          </a:p>
+        </p:txBody>
+      </p:sp>
+    </p:spTree>
+    <p:extLst>
+      <p:ext uri="{BB962C8B-B14F-4D97-AF65-F5344CB8AC3E}">
+        <p14:creationId xmlns:p14="http://schemas.microsoft.com/office/powerpoint/2010/main" val="3166794515"/>
+      </p:ext>
+    </p:extLst>
+  </p:cSld>
+  <p:clrMapOvr>
+    <a:masterClrMapping/>
+  </p:clrMapOvr>
+</p:notes>
+</file>
+
+<file path=ppt/notesSlides/notesSlide13.xml><?xml version="1.0" encoding="utf-8"?>
+<p:notes xmlns:a="http://schemas.openxmlformats.org/drawingml/2006/main" xmlns:r="http://schemas.openxmlformats.org/officeDocument/2006/relationships" xmlns:p="http://schemas.openxmlformats.org/presentationml/2006/main">
+  <p:cSld>
+    <p:spTree>
+      <p:nvGrpSpPr>
+        <p:cNvPr id="1" name=""/>
+        <p:cNvGrpSpPr/>
+        <p:nvPr/>
+      </p:nvGrpSpPr>
+      <p:grpSpPr>
+        <a:xfrm>
+          <a:off x="0" y="0"/>
+          <a:ext cx="0" cy="0"/>
+          <a:chOff x="0" y="0"/>
+          <a:chExt cx="0" cy="0"/>
+        </a:xfrm>
+      </p:grpSpPr>
+      <p:sp>
+        <p:nvSpPr>
+          <p:cNvPr id="2" name="슬라이드 이미지 개체 틀 1"/>
+          <p:cNvSpPr>
+            <a:spLocks noGrp="1" noRot="1" noChangeAspect="1"/>
+          </p:cNvSpPr>
+          <p:nvPr>
+            <p:ph type="sldImg"/>
+          </p:nvPr>
+        </p:nvSpPr>
+        <p:spPr/>
+      </p:sp>
+      <p:sp>
+        <p:nvSpPr>
+          <p:cNvPr id="3" name="슬라이드 노트 개체 틀 2"/>
+          <p:cNvSpPr>
+            <a:spLocks noGrp="1"/>
+          </p:cNvSpPr>
+          <p:nvPr>
+            <p:ph type="body" idx="1"/>
+          </p:nvPr>
+        </p:nvSpPr>
+        <p:spPr/>
+        <p:txBody>
+          <a:bodyPr/>
+          <a:lstStyle/>
+          <a:p>
+            <a:r>
+              <a:rPr lang="en-US" altLang="ko-KR" dirty="0"/>
+              <a:t>"So what does this mean for the regulators who are right now writing stablecoin reserve laws?</a:t>
+            </a:r>
+          </a:p>
+          <a:p>
+            <a:r>
+              <a:rPr lang="en-US" altLang="ko-KR" dirty="0"/>
+              <a:t>Four concrete recommendations fall out of our results.</a:t>
+            </a:r>
+          </a:p>
+          <a:p>
+            <a:r>
+              <a:rPr lang="en-US" altLang="ko-KR" dirty="0"/>
+              <a:t>First and most directly: require T-bill holdings of at least 50% of outstanding supply. That places issuers comfortably outside the empirically identified crisis zone of minus 0.524, which translates to 47.6%. Round up to 50% and you have a clean, defensible number.</a:t>
+            </a:r>
+          </a:p>
+          <a:p>
+            <a:r>
+              <a:rPr lang="en-US" altLang="ko-KR" dirty="0"/>
+              <a:t>Second: not all T-bill holdings are equal. A bill maturing in one week can be sold in a crisis much faster than one maturing in six months. Reserve requirements should be weighted by remaining maturity, not just total dollar amount.</a:t>
+            </a:r>
+          </a:p>
+          <a:p>
+            <a:r>
+              <a:rPr lang="en-US" altLang="ko-KR" dirty="0"/>
+              <a:t>Third: our velocity variable — how fast stablecoin supply is changing — actually predicts stress episodes in our data. This suggests regulators should consider dynamic buffer requirements that increase automatically when redemption velocity rises. Think of it like a countercyclical capital buffer, but for stablecoins.</a:t>
+            </a:r>
+          </a:p>
+          <a:p>
+            <a:r>
+              <a:rPr lang="en-US" altLang="ko-KR" dirty="0"/>
+              <a:t>Fourth: size matters. A 100 billion dollar issuer forced to liquidate is ten times more disruptive than a 10 billion dollar issuer. Tiered requirements by AUM make sense.</a:t>
+            </a:r>
+          </a:p>
+          <a:p>
+            <a:r>
+              <a:rPr lang="en-US" altLang="ko-KR" dirty="0"/>
+              <a:t>The bottom line on this slide says it all: T-bill reserves above 50% of supply keeps issuers outside the crisis zone."</a:t>
+            </a:r>
+          </a:p>
+          <a:p>
+            <a:endParaRPr kumimoji="1" lang="ko-KR" altLang="en-US" dirty="0"/>
+          </a:p>
+        </p:txBody>
+      </p:sp>
+      <p:sp>
+        <p:nvSpPr>
+          <p:cNvPr id="4" name="슬라이드 번호 개체 틀 3"/>
+          <p:cNvSpPr>
+            <a:spLocks noGrp="1"/>
+          </p:cNvSpPr>
+          <p:nvPr>
+            <p:ph type="sldNum" sz="quarter" idx="5"/>
+          </p:nvPr>
+        </p:nvSpPr>
+        <p:spPr/>
+        <p:txBody>
+          <a:bodyPr/>
+          <a:lstStyle/>
+          <a:p>
+            <a:fld id="{5D514313-3BDE-834F-BE4B-14A4F858B1F2}" type="slidenum">
+              <a:rPr kumimoji="1" lang="ko-KR" altLang="en-US" smtClean="0"/>
+              <a:t>13</a:t>
+            </a:fld>
+            <a:endParaRPr kumimoji="1" lang="ko-KR" altLang="en-US"/>
+          </a:p>
+        </p:txBody>
+      </p:sp>
+    </p:spTree>
+    <p:extLst>
+      <p:ext uri="{BB962C8B-B14F-4D97-AF65-F5344CB8AC3E}">
+        <p14:creationId xmlns:p14="http://schemas.microsoft.com/office/powerpoint/2010/main" val="990713305"/>
+      </p:ext>
+    </p:extLst>
+  </p:cSld>
+  <p:clrMapOvr>
+    <a:masterClrMapping/>
+  </p:clrMapOvr>
+</p:notes>
+</file>
+
+<file path=ppt/notesSlides/notesSlide14.xml><?xml version="1.0" encoding="utf-8"?>
+<p:notes xmlns:a="http://schemas.openxmlformats.org/drawingml/2006/main" xmlns:r="http://schemas.openxmlformats.org/officeDocument/2006/relationships" xmlns:p="http://schemas.openxmlformats.org/presentationml/2006/main">
+  <p:cSld>
+    <p:spTree>
+      <p:nvGrpSpPr>
+        <p:cNvPr id="1" name=""/>
+        <p:cNvGrpSpPr/>
+        <p:nvPr/>
+      </p:nvGrpSpPr>
+      <p:grpSpPr>
+        <a:xfrm>
+          <a:off x="0" y="0"/>
+          <a:ext cx="0" cy="0"/>
+          <a:chOff x="0" y="0"/>
+          <a:chExt cx="0" cy="0"/>
+        </a:xfrm>
+      </p:grpSpPr>
+      <p:sp>
+        <p:nvSpPr>
+          <p:cNvPr id="2" name="슬라이드 이미지 개체 틀 1"/>
+          <p:cNvSpPr>
+            <a:spLocks noGrp="1" noRot="1" noChangeAspect="1"/>
+          </p:cNvSpPr>
+          <p:nvPr>
+            <p:ph type="sldImg"/>
+          </p:nvPr>
+        </p:nvSpPr>
+        <p:spPr/>
+      </p:sp>
+      <p:sp>
+        <p:nvSpPr>
+          <p:cNvPr id="3" name="슬라이드 노트 개체 틀 2"/>
+          <p:cNvSpPr>
+            <a:spLocks noGrp="1"/>
+          </p:cNvSpPr>
+          <p:nvPr>
+            <p:ph type="body" idx="1"/>
+          </p:nvPr>
+        </p:nvSpPr>
+        <p:spPr/>
+        <p:txBody>
+          <a:bodyPr/>
+          <a:lstStyle/>
+          <a:p>
+            <a:r>
+              <a:rPr lang="en-US" altLang="ko-KR" dirty="0"/>
+              <a:t>"To wrap up. Large-scale USD-pegged stablecoins introduce a two-sided New Triffin Dilemma. The same mechanism that amplifies US exorbitant privilege in normal times embeds a fragility that can rapidly reverse that benefit when reserve buffers fall below a critical threshold.</a:t>
+            </a:r>
+          </a:p>
+          <a:p>
+            <a:r>
+              <a:rPr lang="en-US" altLang="ko-KR" dirty="0"/>
+              <a:t>On the theory side, we extended Maggiori 2017 with stablecoin supply S and reserve buffer B, capturing the asymmetric mechanism formally.</a:t>
+            </a:r>
+          </a:p>
+          <a:p>
+            <a:r>
+              <a:rPr lang="en-US" altLang="ko-KR" dirty="0"/>
+              <a:t>On the empirics, we got three results: beta-one of minus 5.95 confirms privilege amplification. Beta-three of minus 11.30 confirms buffer-conditioned fragility. The Hansen threshold of minus 0.524 is the first data-driven estimate of a reserve adequacy threshold directly applicable to stablecoin regulation. And the 27 percentage point swing in the event study confirms the asymmetry holds in clean quasi-experimental settings.</a:t>
+            </a:r>
+          </a:p>
+          <a:p>
+            <a:r>
+              <a:rPr lang="en-US" altLang="ko-KR" dirty="0"/>
+              <a:t>The honest limitation: our monthly regression captures structure, not causality. The event study is where the causal identification lives.</a:t>
+            </a:r>
+          </a:p>
+          <a:p>
+            <a:r>
+              <a:rPr lang="en-US" altLang="ko-KR" dirty="0"/>
+              <a:t>Thank you — we're happy to take questions."</a:t>
+            </a:r>
+          </a:p>
+          <a:p>
+            <a:endParaRPr kumimoji="1" lang="ko-KR" altLang="en-US" dirty="0"/>
+          </a:p>
+        </p:txBody>
+      </p:sp>
+      <p:sp>
+        <p:nvSpPr>
+          <p:cNvPr id="4" name="슬라이드 번호 개체 틀 3"/>
+          <p:cNvSpPr>
+            <a:spLocks noGrp="1"/>
+          </p:cNvSpPr>
+          <p:nvPr>
+            <p:ph type="sldNum" sz="quarter" idx="5"/>
+          </p:nvPr>
+        </p:nvSpPr>
+        <p:spPr/>
+        <p:txBody>
+          <a:bodyPr/>
+          <a:lstStyle/>
+          <a:p>
+            <a:fld id="{5D514313-3BDE-834F-BE4B-14A4F858B1F2}" type="slidenum">
+              <a:rPr kumimoji="1" lang="ko-KR" altLang="en-US" smtClean="0"/>
+              <a:t>14</a:t>
+            </a:fld>
+            <a:endParaRPr kumimoji="1" lang="ko-KR" altLang="en-US"/>
+          </a:p>
+        </p:txBody>
+      </p:sp>
+    </p:spTree>
+    <p:extLst>
+      <p:ext uri="{BB962C8B-B14F-4D97-AF65-F5344CB8AC3E}">
+        <p14:creationId xmlns:p14="http://schemas.microsoft.com/office/powerpoint/2010/main" val="1650440012"/>
+      </p:ext>
+    </p:extLst>
+  </p:cSld>
+  <p:clrMapOvr>
+    <a:masterClrMapping/>
+  </p:clrMapOvr>
+</p:notes>
+</file>
+
+<file path=ppt/notesSlides/notesSlide15.xml><?xml version="1.0" encoding="utf-8"?>
+<p:notes xmlns:a="http://schemas.openxmlformats.org/drawingml/2006/main" xmlns:r="http://schemas.openxmlformats.org/officeDocument/2006/relationships" xmlns:p="http://schemas.openxmlformats.org/presentationml/2006/main">
+  <p:cSld>
+    <p:spTree>
+      <p:nvGrpSpPr>
+        <p:cNvPr id="1" name=""/>
+        <p:cNvGrpSpPr/>
+        <p:nvPr/>
+      </p:nvGrpSpPr>
+      <p:grpSpPr>
+        <a:xfrm>
+          <a:off x="0" y="0"/>
+          <a:ext cx="0" cy="0"/>
+          <a:chOff x="0" y="0"/>
+          <a:chExt cx="0" cy="0"/>
+        </a:xfrm>
+      </p:grpSpPr>
+      <p:sp>
+        <p:nvSpPr>
+          <p:cNvPr id="2" name="슬라이드 이미지 개체 틀 1"/>
+          <p:cNvSpPr>
+            <a:spLocks noGrp="1" noRot="1" noChangeAspect="1"/>
+          </p:cNvSpPr>
+          <p:nvPr>
+            <p:ph type="sldImg"/>
+          </p:nvPr>
+        </p:nvSpPr>
+        <p:spPr/>
+      </p:sp>
+      <p:sp>
+        <p:nvSpPr>
+          <p:cNvPr id="3" name="슬라이드 노트 개체 틀 2"/>
+          <p:cNvSpPr>
+            <a:spLocks noGrp="1"/>
+          </p:cNvSpPr>
+          <p:nvPr>
+            <p:ph type="body" idx="1"/>
+          </p:nvPr>
+        </p:nvSpPr>
+        <p:spPr/>
+        <p:txBody>
+          <a:bodyPr/>
+          <a:lstStyle/>
+          <a:p>
+            <a:r>
+              <a:rPr lang="en-US" altLang="ko-KR" dirty="0"/>
+              <a:t>"Thank you. We're happy to take any questions on the theory, the data construction, the Hansen threshold methodology, or the event study design."</a:t>
+            </a:r>
+            <a:endParaRPr kumimoji="1" lang="ko-KR" altLang="en-US" dirty="0"/>
+          </a:p>
+        </p:txBody>
+      </p:sp>
+      <p:sp>
+        <p:nvSpPr>
+          <p:cNvPr id="4" name="슬라이드 번호 개체 틀 3"/>
+          <p:cNvSpPr>
+            <a:spLocks noGrp="1"/>
+          </p:cNvSpPr>
+          <p:nvPr>
+            <p:ph type="sldNum" sz="quarter" idx="5"/>
+          </p:nvPr>
+        </p:nvSpPr>
+        <p:spPr/>
+        <p:txBody>
+          <a:bodyPr/>
+          <a:lstStyle/>
+          <a:p>
+            <a:fld id="{5D514313-3BDE-834F-BE4B-14A4F858B1F2}" type="slidenum">
+              <a:rPr kumimoji="1" lang="ko-KR" altLang="en-US" smtClean="0"/>
+              <a:t>15</a:t>
+            </a:fld>
+            <a:endParaRPr kumimoji="1" lang="ko-KR" altLang="en-US"/>
+          </a:p>
+        </p:txBody>
+      </p:sp>
+    </p:spTree>
+    <p:extLst>
+      <p:ext uri="{BB962C8B-B14F-4D97-AF65-F5344CB8AC3E}">
+        <p14:creationId xmlns:p14="http://schemas.microsoft.com/office/powerpoint/2010/main" val="1222221790"/>
+      </p:ext>
+    </p:extLst>
+  </p:cSld>
+  <p:clrMapOvr>
+    <a:masterClrMapping/>
+  </p:clrMapOvr>
+</p:notes>
+</file>
+
+<file path=ppt/notesSlides/notesSlide2.xml><?xml version="1.0" encoding="utf-8"?>
+<p:notes xmlns:a="http://schemas.openxmlformats.org/drawingml/2006/main" xmlns:r="http://schemas.openxmlformats.org/officeDocument/2006/relationships" xmlns:p="http://schemas.openxmlformats.org/presentationml/2006/main">
+  <p:cSld>
+    <p:spTree>
+      <p:nvGrpSpPr>
+        <p:cNvPr id="1" name=""/>
+        <p:cNvGrpSpPr/>
+        <p:nvPr/>
+      </p:nvGrpSpPr>
+      <p:grpSpPr>
+        <a:xfrm>
+          <a:off x="0" y="0"/>
+          <a:ext cx="0" cy="0"/>
+          <a:chOff x="0" y="0"/>
+          <a:chExt cx="0" cy="0"/>
+        </a:xfrm>
+      </p:grpSpPr>
+      <p:sp>
+        <p:nvSpPr>
+          <p:cNvPr id="2" name="슬라이드 이미지 개체 틀 1"/>
+          <p:cNvSpPr>
+            <a:spLocks noGrp="1" noRot="1" noChangeAspect="1"/>
+          </p:cNvSpPr>
+          <p:nvPr>
+            <p:ph type="sldImg"/>
+          </p:nvPr>
+        </p:nvSpPr>
+        <p:spPr/>
+      </p:sp>
+      <p:sp>
+        <p:nvSpPr>
+          <p:cNvPr id="3" name="슬라이드 노트 개체 틀 2"/>
+          <p:cNvSpPr>
+            <a:spLocks noGrp="1"/>
+          </p:cNvSpPr>
+          <p:nvPr>
+            <p:ph type="body" idx="1"/>
+          </p:nvPr>
+        </p:nvSpPr>
+        <p:spPr/>
+        <p:txBody>
+          <a:bodyPr/>
+          <a:lstStyle/>
+          <a:p>
+            <a:pPr marL="0" marR="0" lvl="0" indent="0" algn="l" defTabSz="914400" rtl="0" eaLnBrk="1" fontAlgn="auto" latinLnBrk="1" hangingPunct="1">
+              <a:lnSpc>
+                <a:spcPct val="100000"/>
+              </a:lnSpc>
+              <a:spcBef>
+                <a:spcPts val="0"/>
+              </a:spcBef>
+              <a:spcAft>
+                <a:spcPts val="0"/>
+              </a:spcAft>
+              <a:buClrTx/>
+              <a:buSzTx/>
+              <a:buFontTx/>
+              <a:buNone/>
+              <a:tabLst/>
+              <a:defRPr/>
+            </a:pPr>
+            <a:r>
+              <a:rPr lang="en-US" altLang="ko-KR" dirty="0"/>
+              <a:t>"Here's how we'll walk you through it. We start with why this matters, then we lay out our central argument — the New Triffin Dilemma. After that we cover the theory we built on, the data and methods, then we walk through our three results one by one, robustness checks, a summary, policy implications, and we finish with the conclusion. The three results are really the heart of the presentation, so we'll spend the most time there."</a:t>
+            </a:r>
+          </a:p>
+          <a:p>
+            <a:endParaRPr kumimoji="1" lang="ko-KR" altLang="en-US" dirty="0"/>
+          </a:p>
+        </p:txBody>
+      </p:sp>
+      <p:sp>
+        <p:nvSpPr>
+          <p:cNvPr id="4" name="슬라이드 번호 개체 틀 3"/>
+          <p:cNvSpPr>
+            <a:spLocks noGrp="1"/>
+          </p:cNvSpPr>
+          <p:nvPr>
+            <p:ph type="sldNum" sz="quarter" idx="5"/>
+          </p:nvPr>
+        </p:nvSpPr>
+        <p:spPr/>
+        <p:txBody>
+          <a:bodyPr/>
+          <a:lstStyle/>
+          <a:p>
+            <a:fld id="{5D514313-3BDE-834F-BE4B-14A4F858B1F2}" type="slidenum">
+              <a:rPr kumimoji="1" lang="ko-KR" altLang="en-US" smtClean="0"/>
+              <a:t>2</a:t>
+            </a:fld>
+            <a:endParaRPr kumimoji="1" lang="ko-KR" altLang="en-US"/>
+          </a:p>
+        </p:txBody>
+      </p:sp>
+    </p:spTree>
+    <p:extLst>
+      <p:ext uri="{BB962C8B-B14F-4D97-AF65-F5344CB8AC3E}">
+        <p14:creationId xmlns:p14="http://schemas.microsoft.com/office/powerpoint/2010/main" val="3556110794"/>
+      </p:ext>
+    </p:extLst>
+  </p:cSld>
+  <p:clrMapOvr>
+    <a:masterClrMapping/>
+  </p:clrMapOvr>
+</p:notes>
+</file>
+
+<file path=ppt/notesSlides/notesSlide3.xml><?xml version="1.0" encoding="utf-8"?>
+<p:notes xmlns:a="http://schemas.openxmlformats.org/drawingml/2006/main" xmlns:r="http://schemas.openxmlformats.org/officeDocument/2006/relationships" xmlns:p="http://schemas.openxmlformats.org/presentationml/2006/main">
+  <p:cSld>
+    <p:spTree>
+      <p:nvGrpSpPr>
+        <p:cNvPr id="1" name=""/>
+        <p:cNvGrpSpPr/>
+        <p:nvPr/>
+      </p:nvGrpSpPr>
+      <p:grpSpPr>
+        <a:xfrm>
+          <a:off x="0" y="0"/>
+          <a:ext cx="0" cy="0"/>
+          <a:chOff x="0" y="0"/>
+          <a:chExt cx="0" cy="0"/>
+        </a:xfrm>
+      </p:grpSpPr>
+      <p:sp>
+        <p:nvSpPr>
+          <p:cNvPr id="2" name="슬라이드 이미지 개체 틀 1"/>
+          <p:cNvSpPr>
+            <a:spLocks noGrp="1" noRot="1" noChangeAspect="1"/>
+          </p:cNvSpPr>
+          <p:nvPr>
+            <p:ph type="sldImg"/>
+          </p:nvPr>
+        </p:nvSpPr>
+        <p:spPr/>
+      </p:sp>
+      <p:sp>
+        <p:nvSpPr>
+          <p:cNvPr id="3" name="슬라이드 노트 개체 틀 2"/>
+          <p:cNvSpPr>
+            <a:spLocks noGrp="1"/>
+          </p:cNvSpPr>
+          <p:nvPr>
+            <p:ph type="body" idx="1"/>
+          </p:nvPr>
+        </p:nvSpPr>
+        <p:spPr/>
+        <p:txBody>
+          <a:bodyPr/>
+          <a:lstStyle/>
+          <a:p>
+            <a:r>
+              <a:rPr lang="en-US" altLang="ko-KR" dirty="0"/>
+              <a:t>"So why does this matter to international finance? Look at the numbers on the right side of this slide. The combined stablecoin market has gone from under 50 billion dollars in 2021 to over 300 billion today. That's a six-fold increase in five years. Tether alone now holds 127 billion dollars in US Treasury bills — that makes them comparable to the treasury holdings of a mid-sized sovereign government. And projections say this market could reach one to two trillion dollars within this decade.</a:t>
+            </a:r>
+          </a:p>
+          <a:p>
+            <a:r>
+              <a:rPr lang="en-US" altLang="ko-KR" dirty="0"/>
+              <a:t>Here's the key mechanism to understand. Stablecoins work by a simple rule: every dollar of stablecoin issued must be backed 1:1 by short-term US Treasuries. So as the market grows, issuers automatically become enormous, rule-bound buyers of T-bills. They're not making discretionary investment decisions — they have to buy.</a:t>
+            </a:r>
+          </a:p>
+          <a:p>
+            <a:r>
+              <a:rPr lang="en-US" altLang="ko-KR" dirty="0"/>
+              <a:t>Four major jurisdictions — the US, EU, Japan, and Hong Kong — are all right now finalizing legislation on how to regulate stablecoin reserves. The question everyone is fighting about is: how much Treasury backing is enough? Our paper gives that question a data-driven answer.</a:t>
+            </a:r>
+          </a:p>
+          <a:p>
+            <a:r>
+              <a:rPr lang="en-US" altLang="ko-KR" dirty="0"/>
+              <a:t>As the bottom bar says: the same structural role that deepens US safe-asset demand also embeds a fragility that can rapidly reverse it."</a:t>
+            </a:r>
+          </a:p>
+          <a:p>
+            <a:endParaRPr kumimoji="1" lang="ko-KR" altLang="en-US" dirty="0"/>
+          </a:p>
+        </p:txBody>
+      </p:sp>
+      <p:sp>
+        <p:nvSpPr>
+          <p:cNvPr id="4" name="슬라이드 번호 개체 틀 3"/>
+          <p:cNvSpPr>
+            <a:spLocks noGrp="1"/>
+          </p:cNvSpPr>
+          <p:nvPr>
+            <p:ph type="sldNum" sz="quarter" idx="5"/>
+          </p:nvPr>
+        </p:nvSpPr>
+        <p:spPr/>
+        <p:txBody>
+          <a:bodyPr/>
+          <a:lstStyle/>
+          <a:p>
+            <a:fld id="{5D514313-3BDE-834F-BE4B-14A4F858B1F2}" type="slidenum">
+              <a:rPr kumimoji="1" lang="ko-KR" altLang="en-US" smtClean="0"/>
+              <a:t>3</a:t>
+            </a:fld>
+            <a:endParaRPr kumimoji="1" lang="ko-KR" altLang="en-US"/>
+          </a:p>
+        </p:txBody>
+      </p:sp>
+    </p:spTree>
+    <p:extLst>
+      <p:ext uri="{BB962C8B-B14F-4D97-AF65-F5344CB8AC3E}">
+        <p14:creationId xmlns:p14="http://schemas.microsoft.com/office/powerpoint/2010/main" val="1753441285"/>
+      </p:ext>
+    </p:extLst>
+  </p:cSld>
+  <p:clrMapOvr>
+    <a:masterClrMapping/>
+  </p:clrMapOvr>
+</p:notes>
+</file>
+
+<file path=ppt/notesSlides/notesSlide4.xml><?xml version="1.0" encoding="utf-8"?>
+<p:notes xmlns:a="http://schemas.openxmlformats.org/drawingml/2006/main" xmlns:r="http://schemas.openxmlformats.org/officeDocument/2006/relationships" xmlns:p="http://schemas.openxmlformats.org/presentationml/2006/main">
+  <p:cSld>
+    <p:spTree>
+      <p:nvGrpSpPr>
+        <p:cNvPr id="1" name=""/>
+        <p:cNvGrpSpPr/>
+        <p:nvPr/>
+      </p:nvGrpSpPr>
+      <p:grpSpPr>
+        <a:xfrm>
+          <a:off x="0" y="0"/>
+          <a:ext cx="0" cy="0"/>
+          <a:chOff x="0" y="0"/>
+          <a:chExt cx="0" cy="0"/>
+        </a:xfrm>
+      </p:grpSpPr>
+      <p:sp>
+        <p:nvSpPr>
+          <p:cNvPr id="2" name="슬라이드 이미지 개체 틀 1"/>
+          <p:cNvSpPr>
+            <a:spLocks noGrp="1" noRot="1" noChangeAspect="1"/>
+          </p:cNvSpPr>
+          <p:nvPr>
+            <p:ph type="sldImg"/>
+          </p:nvPr>
+        </p:nvSpPr>
+        <p:spPr/>
+      </p:sp>
+      <p:sp>
+        <p:nvSpPr>
+          <p:cNvPr id="3" name="슬라이드 노트 개체 틀 2"/>
+          <p:cNvSpPr>
+            <a:spLocks noGrp="1"/>
+          </p:cNvSpPr>
+          <p:nvPr>
+            <p:ph type="body" idx="1"/>
+          </p:nvPr>
+        </p:nvSpPr>
+        <p:spPr/>
+        <p:txBody>
+          <a:bodyPr/>
+          <a:lstStyle/>
+          <a:p>
+            <a:r>
+              <a:rPr lang="en-US" altLang="ko-KR" dirty="0"/>
+              <a:t>"This slide is the conceptual heart of the paper. At the top you can see the original Triffin Dilemma from 1960 — Triffin argued the US dollar's reserve currency role was inherently self-defeating. The world needed dollars, so the US had to run deficits to supply them, but those deficits eventually undermined confidence in the dollar. A built-in contradiction.</a:t>
+            </a:r>
+          </a:p>
+          <a:p>
+            <a:r>
+              <a:rPr lang="en-US" altLang="ko-KR" dirty="0"/>
+              <a:t>We argue stablecoins create an exact analogue of this for private issuers.</a:t>
+            </a:r>
+          </a:p>
+          <a:p>
+            <a:r>
+              <a:rPr lang="en-US" altLang="ko-KR" dirty="0"/>
+              <a:t>Look at the green column on the left. In normal times, everything works beautifully. Stablecoin growth means more T-bill buying, which deepens safe-asset demand, which compresses the OIS-Treasury spread — meaning the US borrows more cheaply. This amplifies what economists call the exorbitant privilege.</a:t>
+            </a:r>
+          </a:p>
+          <a:p>
+            <a:r>
+              <a:rPr lang="en-US" altLang="ko-KR" dirty="0"/>
+              <a:t>Now look at the red column in the middle. In a run scenario, everything reverses. A run on a stablecoin issuer forces them to liquidate T-bills fast. That floods the market, yields spike above OIS, and you get a sovereign-linked liquidity shock. This is what Cole and Kehoe call the crisis zone — a self-fulfilling panic.</a:t>
+            </a:r>
+          </a:p>
+          <a:p>
+            <a:r>
+              <a:rPr lang="en-US" altLang="ko-KR" dirty="0"/>
+              <a:t>The key question — shown in the blue column on the right — is: what determines which scenario you end up in? The answer is the reserve buffer B. That's how many Treasuries the issuer holds above what they owe. If the buffer is large enough, it absorbs the run. If not, forced liquidation kicks in.</a:t>
+            </a:r>
+          </a:p>
+          <a:p>
+            <a:r>
+              <a:rPr lang="en-US" altLang="ko-KR" dirty="0"/>
+              <a:t>Our paper's entire goal is to estimate that threshold — the exact buffer level that separates safety from crisis."</a:t>
+            </a:r>
+          </a:p>
+          <a:p>
+            <a:endParaRPr kumimoji="1" lang="ko-KR" altLang="en-US" dirty="0"/>
+          </a:p>
+        </p:txBody>
+      </p:sp>
+      <p:sp>
+        <p:nvSpPr>
+          <p:cNvPr id="4" name="슬라이드 번호 개체 틀 3"/>
+          <p:cNvSpPr>
+            <a:spLocks noGrp="1"/>
+          </p:cNvSpPr>
+          <p:nvPr>
+            <p:ph type="sldNum" sz="quarter" idx="5"/>
+          </p:nvPr>
+        </p:nvSpPr>
+        <p:spPr/>
+        <p:txBody>
+          <a:bodyPr/>
+          <a:lstStyle/>
+          <a:p>
+            <a:fld id="{5D514313-3BDE-834F-BE4B-14A4F858B1F2}" type="slidenum">
+              <a:rPr kumimoji="1" lang="ko-KR" altLang="en-US" smtClean="0"/>
+              <a:t>4</a:t>
+            </a:fld>
+            <a:endParaRPr kumimoji="1" lang="ko-KR" altLang="en-US"/>
+          </a:p>
+        </p:txBody>
+      </p:sp>
+    </p:spTree>
+    <p:extLst>
+      <p:ext uri="{BB962C8B-B14F-4D97-AF65-F5344CB8AC3E}">
+        <p14:creationId xmlns:p14="http://schemas.microsoft.com/office/powerpoint/2010/main" val="530807997"/>
+      </p:ext>
+    </p:extLst>
+  </p:cSld>
+  <p:clrMapOvr>
+    <a:masterClrMapping/>
+  </p:clrMapOvr>
+</p:notes>
+</file>
+
+<file path=ppt/notesSlides/notesSlide5.xml><?xml version="1.0" encoding="utf-8"?>
+<p:notes xmlns:a="http://schemas.openxmlformats.org/drawingml/2006/main" xmlns:r="http://schemas.openxmlformats.org/officeDocument/2006/relationships" xmlns:p="http://schemas.openxmlformats.org/presentationml/2006/main">
+  <p:cSld>
+    <p:spTree>
+      <p:nvGrpSpPr>
+        <p:cNvPr id="1" name=""/>
+        <p:cNvGrpSpPr/>
+        <p:nvPr/>
+      </p:nvGrpSpPr>
+      <p:grpSpPr>
+        <a:xfrm>
+          <a:off x="0" y="0"/>
+          <a:ext cx="0" cy="0"/>
+          <a:chOff x="0" y="0"/>
+          <a:chExt cx="0" cy="0"/>
+        </a:xfrm>
+      </p:grpSpPr>
+      <p:sp>
+        <p:nvSpPr>
+          <p:cNvPr id="2" name="슬라이드 이미지 개체 틀 1"/>
+          <p:cNvSpPr>
+            <a:spLocks noGrp="1" noRot="1" noChangeAspect="1"/>
+          </p:cNvSpPr>
+          <p:nvPr>
+            <p:ph type="sldImg"/>
+          </p:nvPr>
+        </p:nvSpPr>
+        <p:spPr/>
+      </p:sp>
+      <p:sp>
+        <p:nvSpPr>
+          <p:cNvPr id="3" name="슬라이드 노트 개체 틀 2"/>
+          <p:cNvSpPr>
+            <a:spLocks noGrp="1"/>
+          </p:cNvSpPr>
+          <p:nvPr>
+            <p:ph type="body" idx="1"/>
+          </p:nvPr>
+        </p:nvSpPr>
+        <p:spPr/>
+        <p:txBody>
+          <a:bodyPr/>
+          <a:lstStyle/>
+          <a:p>
+            <a:r>
+              <a:rPr lang="en-US" altLang="ko-KR" dirty="0"/>
+              <a:t>"Now let's talk about the theory we built on. The starting point is Maggiori 2017, a landmark paper in international finance. His model shows that demand for US safe assets is driven by something called Omega-star — the marginal value of rest-of-world financial net worth. Think of it as a global stress meter. When the world's financial institutions are stressed, Omega-star goes up and the world reaches hard for US Treasuries, compressing US spreads.</a:t>
+            </a:r>
+          </a:p>
+          <a:p>
+            <a:r>
+              <a:rPr lang="en-US" altLang="ko-KR" dirty="0"/>
+              <a:t>But here's the gap: Maggiori's model only captures discretionary demand. A bank deciding to buy Treasuries as a precaution. It has no room for a stablecoin issuer that must buy Treasuries automatically the moment it issues a dollar.</a:t>
+            </a:r>
+          </a:p>
+          <a:p>
+            <a:r>
+              <a:rPr lang="en-US" altLang="ko-KR" dirty="0"/>
+              <a:t>So we added two variables. S is total stablecoin supply. B is the reserve buffer — Treasury holdings minus outstanding supply.</a:t>
+            </a:r>
+          </a:p>
+          <a:p>
+            <a:r>
+              <a:rPr lang="en-US" altLang="ko-KR" dirty="0"/>
+              <a:t>Our extended demand equation is on the left: total safe-asset demand now has three components — the original precautionary demand from Maggiori, the new stablecoin demand from S, and the buffer effect from B.</a:t>
+            </a:r>
+          </a:p>
+          <a:p>
+            <a:r>
+              <a:rPr lang="en-US" altLang="ko-KR" dirty="0"/>
+              <a:t>On the right you can see the regression equation we estimate. The predicted signs are straightforward. Beta-one should be negative — more stablecoin supply means more T-bill buying, so spreads compress. Beta-two should be negative — a bigger buffer means even more demand. And beta-three should be negative — when the buffer is low, it reverses the compression, eventually flipping it to spread widening. These are the hypotheses we go out to test."</a:t>
+            </a:r>
+          </a:p>
+          <a:p>
+            <a:endParaRPr kumimoji="1" lang="ko-KR" altLang="en-US" dirty="0"/>
+          </a:p>
+        </p:txBody>
+      </p:sp>
+      <p:sp>
+        <p:nvSpPr>
+          <p:cNvPr id="4" name="슬라이드 번호 개체 틀 3"/>
+          <p:cNvSpPr>
+            <a:spLocks noGrp="1"/>
+          </p:cNvSpPr>
+          <p:nvPr>
+            <p:ph type="sldNum" sz="quarter" idx="5"/>
+          </p:nvPr>
+        </p:nvSpPr>
+        <p:spPr/>
+        <p:txBody>
+          <a:bodyPr/>
+          <a:lstStyle/>
+          <a:p>
+            <a:fld id="{5D514313-3BDE-834F-BE4B-14A4F858B1F2}" type="slidenum">
+              <a:rPr kumimoji="1" lang="ko-KR" altLang="en-US" smtClean="0"/>
+              <a:t>5</a:t>
+            </a:fld>
+            <a:endParaRPr kumimoji="1" lang="ko-KR" altLang="en-US"/>
+          </a:p>
+        </p:txBody>
+      </p:sp>
+    </p:spTree>
+    <p:extLst>
+      <p:ext uri="{BB962C8B-B14F-4D97-AF65-F5344CB8AC3E}">
+        <p14:creationId xmlns:p14="http://schemas.microsoft.com/office/powerpoint/2010/main" val="2675809819"/>
+      </p:ext>
+    </p:extLst>
+  </p:cSld>
+  <p:clrMapOvr>
+    <a:masterClrMapping/>
+  </p:clrMapOvr>
+</p:notes>
+</file>
+
+<file path=ppt/notesSlides/notesSlide6.xml><?xml version="1.0" encoding="utf-8"?>
+<p:notes xmlns:a="http://schemas.openxmlformats.org/drawingml/2006/main" xmlns:r="http://schemas.openxmlformats.org/officeDocument/2006/relationships" xmlns:p="http://schemas.openxmlformats.org/presentationml/2006/main">
+  <p:cSld>
+    <p:spTree>
+      <p:nvGrpSpPr>
+        <p:cNvPr id="1" name=""/>
+        <p:cNvGrpSpPr/>
+        <p:nvPr/>
+      </p:nvGrpSpPr>
+      <p:grpSpPr>
+        <a:xfrm>
+          <a:off x="0" y="0"/>
+          <a:ext cx="0" cy="0"/>
+          <a:chOff x="0" y="0"/>
+          <a:chExt cx="0" cy="0"/>
+        </a:xfrm>
+      </p:grpSpPr>
+      <p:sp>
+        <p:nvSpPr>
+          <p:cNvPr id="2" name="슬라이드 이미지 개체 틀 1"/>
+          <p:cNvSpPr>
+            <a:spLocks noGrp="1" noRot="1" noChangeAspect="1"/>
+          </p:cNvSpPr>
+          <p:nvPr>
+            <p:ph type="sldImg"/>
+          </p:nvPr>
+        </p:nvSpPr>
+        <p:spPr/>
+      </p:sp>
+      <p:sp>
+        <p:nvSpPr>
+          <p:cNvPr id="3" name="슬라이드 노트 개체 틀 2"/>
+          <p:cNvSpPr>
+            <a:spLocks noGrp="1"/>
+          </p:cNvSpPr>
+          <p:nvPr>
+            <p:ph type="body" idx="1"/>
+          </p:nvPr>
+        </p:nvSpPr>
+        <p:spPr/>
+        <p:txBody>
+          <a:bodyPr/>
+          <a:lstStyle/>
+          <a:p>
+            <a:r>
+              <a:rPr lang="en-US" altLang="ko-KR" dirty="0"/>
+              <a:t>"Our data comes from six sources, all shown in this table. The dependent variable — the OIS-Treasury spread — is the 3-month T-bill yield minus the 90-day SOFR average, both pulled directly from FRED. Stablecoin supply comes from </a:t>
+            </a:r>
+            <a:r>
+              <a:rPr lang="en-US" altLang="ko-KR" dirty="0" err="1"/>
+              <a:t>DeFiLlama's</a:t>
+            </a:r>
+            <a:r>
+              <a:rPr lang="en-US" altLang="ko-KR" dirty="0"/>
+              <a:t> free API. The reserve buffer is the hardest variable to construct — we built it from Tether's quarterly BDO attestation reports and Circle's monthly Deloitte and Grant Thornton attestations, which disclose how much they actually hold in T-bills.</a:t>
+            </a:r>
+          </a:p>
+          <a:p>
+            <a:r>
+              <a:rPr lang="en-US" altLang="ko-KR" dirty="0"/>
+              <a:t>One important note at the bottom: before Q1 2021, Tether didn't publish formal attestations. For that pre-attestation period, we estimated their T-bill holdings at 2% of supply, consistent with the 2.94% they disclosed in their first official report. Our results hold up even if we drop that period entirely — we'll show that in the robustness slide.</a:t>
+            </a:r>
+          </a:p>
+          <a:p>
+            <a:r>
+              <a:rPr lang="en-US" altLang="ko-KR" dirty="0"/>
+              <a:t>Total sample: 75 monthly observations from January 2020 to March 2026."</a:t>
+            </a:r>
+          </a:p>
+          <a:p>
+            <a:endParaRPr kumimoji="1" lang="ko-KR" altLang="en-US" dirty="0"/>
+          </a:p>
+        </p:txBody>
+      </p:sp>
+      <p:sp>
+        <p:nvSpPr>
+          <p:cNvPr id="4" name="슬라이드 번호 개체 틀 3"/>
+          <p:cNvSpPr>
+            <a:spLocks noGrp="1"/>
+          </p:cNvSpPr>
+          <p:nvPr>
+            <p:ph type="sldNum" sz="quarter" idx="5"/>
+          </p:nvPr>
+        </p:nvSpPr>
+        <p:spPr/>
+        <p:txBody>
+          <a:bodyPr/>
+          <a:lstStyle/>
+          <a:p>
+            <a:fld id="{5D514313-3BDE-834F-BE4B-14A4F858B1F2}" type="slidenum">
+              <a:rPr kumimoji="1" lang="ko-KR" altLang="en-US" smtClean="0"/>
+              <a:t>6</a:t>
+            </a:fld>
+            <a:endParaRPr kumimoji="1" lang="ko-KR" altLang="en-US"/>
+          </a:p>
+        </p:txBody>
+      </p:sp>
+    </p:spTree>
+    <p:extLst>
+      <p:ext uri="{BB962C8B-B14F-4D97-AF65-F5344CB8AC3E}">
+        <p14:creationId xmlns:p14="http://schemas.microsoft.com/office/powerpoint/2010/main" val="3511974888"/>
+      </p:ext>
+    </p:extLst>
+  </p:cSld>
+  <p:clrMapOvr>
+    <a:masterClrMapping/>
+  </p:clrMapOvr>
+</p:notes>
+</file>
+
+<file path=ppt/notesSlides/notesSlide7.xml><?xml version="1.0" encoding="utf-8"?>
+<p:notes xmlns:a="http://schemas.openxmlformats.org/drawingml/2006/main" xmlns:r="http://schemas.openxmlformats.org/officeDocument/2006/relationships" xmlns:p="http://schemas.openxmlformats.org/presentationml/2006/main">
+  <p:cSld>
+    <p:spTree>
+      <p:nvGrpSpPr>
+        <p:cNvPr id="1" name=""/>
+        <p:cNvGrpSpPr/>
+        <p:nvPr/>
+      </p:nvGrpSpPr>
+      <p:grpSpPr>
+        <a:xfrm>
+          <a:off x="0" y="0"/>
+          <a:ext cx="0" cy="0"/>
+          <a:chOff x="0" y="0"/>
+          <a:chExt cx="0" cy="0"/>
+        </a:xfrm>
+      </p:grpSpPr>
+      <p:sp>
+        <p:nvSpPr>
+          <p:cNvPr id="2" name="슬라이드 이미지 개체 틀 1"/>
+          <p:cNvSpPr>
+            <a:spLocks noGrp="1" noRot="1" noChangeAspect="1"/>
+          </p:cNvSpPr>
+          <p:nvPr>
+            <p:ph type="sldImg"/>
+          </p:nvPr>
+        </p:nvSpPr>
+        <p:spPr/>
+      </p:sp>
+      <p:sp>
+        <p:nvSpPr>
+          <p:cNvPr id="3" name="슬라이드 노트 개체 틀 2"/>
+          <p:cNvSpPr>
+            <a:spLocks noGrp="1"/>
+          </p:cNvSpPr>
+          <p:nvPr>
+            <p:ph type="body" idx="1"/>
+          </p:nvPr>
+        </p:nvSpPr>
+        <p:spPr/>
+        <p:txBody>
+          <a:bodyPr/>
+          <a:lstStyle/>
+          <a:p>
+            <a:r>
+              <a:rPr lang="en-US" altLang="ko-KR" dirty="0"/>
+              <a:t>"This slide shows you all three key variables plotted over time, and it tells the story of the paper visually before you even look at the regressions.</a:t>
+            </a:r>
+          </a:p>
+          <a:p>
+            <a:r>
+              <a:rPr lang="en-US" altLang="ko-KR" dirty="0"/>
+              <a:t>Panel A at the top is the OIS-Treasury spread — our dependent variable. Notice how it tracks exactly what we'd expect. Through 2021 and into early 2022, as stablecoin supply in Panel B was growing rapidly, the spread was compressing — moving negative, meaning the US was borrowing more cheaply than the risk-free benchmark.</a:t>
+            </a:r>
+          </a:p>
+          <a:p>
+            <a:r>
+              <a:rPr lang="en-US" altLang="ko-KR" dirty="0"/>
+              <a:t>Then look at May 2022 — the first red dotted line. That's the LUNA collapse and the USDT </a:t>
+            </a:r>
+            <a:r>
+              <a:rPr lang="en-US" altLang="ko-KR" dirty="0" err="1"/>
+              <a:t>depeg</a:t>
+            </a:r>
+            <a:r>
+              <a:rPr lang="en-US" altLang="ko-KR" dirty="0"/>
+              <a:t>. The spread spikes violently. That's the sovereign shock we predict for low-buffer events.</a:t>
+            </a:r>
+          </a:p>
+          <a:p>
+            <a:r>
+              <a:rPr lang="en-US" altLang="ko-KR" dirty="0"/>
+              <a:t>Panel C is the reserve buffer ratio over time. See how it starts deeply negative — below our threshold of minus 0.524, shown by the red dashed line — meaning issuers were barely backing their liabilities with Treasuries in the early years. Then from 2023 onwards, as Tether shifted its reserves heavily into T-bills, the buffer improved dramatically and moved above the crisis zone. And look at the brief dip in early 2026 — that corresponds to the third stress event, the USDC and SVB situation.</a:t>
+            </a:r>
+          </a:p>
+          <a:p>
+            <a:r>
+              <a:rPr lang="en-US" altLang="ko-KR" dirty="0"/>
+              <a:t>This chart is your visual intuition for everything that follows."</a:t>
+            </a:r>
+          </a:p>
+          <a:p>
+            <a:endParaRPr kumimoji="1" lang="ko-KR" altLang="en-US" dirty="0"/>
+          </a:p>
+        </p:txBody>
+      </p:sp>
+      <p:sp>
+        <p:nvSpPr>
+          <p:cNvPr id="4" name="슬라이드 번호 개체 틀 3"/>
+          <p:cNvSpPr>
+            <a:spLocks noGrp="1"/>
+          </p:cNvSpPr>
+          <p:nvPr>
+            <p:ph type="sldNum" sz="quarter" idx="5"/>
+          </p:nvPr>
+        </p:nvSpPr>
+        <p:spPr/>
+        <p:txBody>
+          <a:bodyPr/>
+          <a:lstStyle/>
+          <a:p>
+            <a:fld id="{5D514313-3BDE-834F-BE4B-14A4F858B1F2}" type="slidenum">
+              <a:rPr kumimoji="1" lang="ko-KR" altLang="en-US" smtClean="0"/>
+              <a:t>7</a:t>
+            </a:fld>
+            <a:endParaRPr kumimoji="1" lang="ko-KR" altLang="en-US"/>
+          </a:p>
+        </p:txBody>
+      </p:sp>
+    </p:spTree>
+    <p:extLst>
+      <p:ext uri="{BB962C8B-B14F-4D97-AF65-F5344CB8AC3E}">
+        <p14:creationId xmlns:p14="http://schemas.microsoft.com/office/powerpoint/2010/main" val="1299571110"/>
+      </p:ext>
+    </p:extLst>
+  </p:cSld>
+  <p:clrMapOvr>
+    <a:masterClrMapping/>
+  </p:clrMapOvr>
+</p:notes>
+</file>
+
+<file path=ppt/notesSlides/notesSlide8.xml><?xml version="1.0" encoding="utf-8"?>
+<p:notes xmlns:a="http://schemas.openxmlformats.org/drawingml/2006/main" xmlns:r="http://schemas.openxmlformats.org/officeDocument/2006/relationships" xmlns:p="http://schemas.openxmlformats.org/presentationml/2006/main">
+  <p:cSld>
+    <p:spTree>
+      <p:nvGrpSpPr>
+        <p:cNvPr id="1" name=""/>
+        <p:cNvGrpSpPr/>
+        <p:nvPr/>
+      </p:nvGrpSpPr>
+      <p:grpSpPr>
+        <a:xfrm>
+          <a:off x="0" y="0"/>
+          <a:ext cx="0" cy="0"/>
+          <a:chOff x="0" y="0"/>
+          <a:chExt cx="0" cy="0"/>
+        </a:xfrm>
+      </p:grpSpPr>
+      <p:sp>
+        <p:nvSpPr>
+          <p:cNvPr id="2" name="슬라이드 이미지 개체 틀 1"/>
+          <p:cNvSpPr>
+            <a:spLocks noGrp="1" noRot="1" noChangeAspect="1"/>
+          </p:cNvSpPr>
+          <p:nvPr>
+            <p:ph type="sldImg"/>
+          </p:nvPr>
+        </p:nvSpPr>
+        <p:spPr/>
+      </p:sp>
+      <p:sp>
+        <p:nvSpPr>
+          <p:cNvPr id="3" name="슬라이드 노트 개체 틀 2"/>
+          <p:cNvSpPr>
+            <a:spLocks noGrp="1"/>
+          </p:cNvSpPr>
+          <p:nvPr>
+            <p:ph type="body" idx="1"/>
+          </p:nvPr>
+        </p:nvSpPr>
+        <p:spPr/>
+        <p:txBody>
+          <a:bodyPr/>
+          <a:lstStyle/>
+          <a:p>
+            <a:r>
+              <a:rPr lang="en-US" altLang="ko-KR" dirty="0"/>
+              <a:t>"Now our first result. The regression table on the left shows the full OLS specification with Newey-West standard errors to handle the fact that monthly time-series data isn't independent across observations.</a:t>
+            </a:r>
+          </a:p>
+          <a:p>
+            <a:r>
+              <a:rPr lang="en-US" altLang="ko-KR" dirty="0"/>
+              <a:t>The two numbers that matter are highlighted on the right.</a:t>
+            </a:r>
+          </a:p>
+          <a:p>
+            <a:r>
+              <a:rPr lang="en-US" altLang="ko-KR" dirty="0"/>
+              <a:t>Beta-one is minus 5.95, with three stars, meaning it's significant at the 1% level. In plain English: a one standard deviation increase in monthly stablecoin supply growth — that's about 10 percentage points — is associated with a 59 basis point compression of the OIS-Treasury spread. The US is measurably borrowing more cheaply during months when stablecoins are growing fast. Hypothesis 1 confirmed.</a:t>
+            </a:r>
+          </a:p>
+          <a:p>
+            <a:r>
+              <a:rPr lang="en-US" altLang="ko-KR" dirty="0"/>
+              <a:t>Beta-three is minus 11.30, also three stars. This is the interaction between the buffer and supply growth. Since the buffer B is always negative in our data — issuers never held more Treasuries than they owed — a more negative buffer shrinks the compression effect and eventually reverses it.</a:t>
+            </a:r>
+          </a:p>
+          <a:p>
+            <a:r>
+              <a:rPr lang="en-US" altLang="ko-KR" dirty="0"/>
+              <a:t>The right-hand box shows the math. The total effect of supply growth on spreads is beta-one plus beta-three times B. At the sample average buffer of minus 0.48, the net effect is only minus 0.52 percentage points — much weaker than the raw beta-one suggests, because the low buffer is neutralizing most of the privilege. And at our estimated crisis zone boundary of B equals minus 0.524, the effect approaches zero entirely. That's exactly what the theory predicts.</a:t>
+            </a:r>
+          </a:p>
+          <a:p>
+            <a:r>
+              <a:rPr lang="en-US" altLang="ko-KR" dirty="0"/>
+              <a:t>Also note the R-squared of 0.32 — our model explains about a third of the variation in monthly spreads, which is strong for macro time-series data."</a:t>
+            </a:r>
+          </a:p>
+          <a:p>
+            <a:endParaRPr kumimoji="1" lang="ko-KR" altLang="en-US" dirty="0"/>
+          </a:p>
+        </p:txBody>
+      </p:sp>
+      <p:sp>
+        <p:nvSpPr>
+          <p:cNvPr id="4" name="슬라이드 번호 개체 틀 3"/>
+          <p:cNvSpPr>
+            <a:spLocks noGrp="1"/>
+          </p:cNvSpPr>
+          <p:nvPr>
+            <p:ph type="sldNum" sz="quarter" idx="5"/>
+          </p:nvPr>
+        </p:nvSpPr>
+        <p:spPr/>
+        <p:txBody>
+          <a:bodyPr/>
+          <a:lstStyle/>
+          <a:p>
+            <a:fld id="{5D514313-3BDE-834F-BE4B-14A4F858B1F2}" type="slidenum">
+              <a:rPr kumimoji="1" lang="ko-KR" altLang="en-US" smtClean="0"/>
+              <a:t>8</a:t>
+            </a:fld>
+            <a:endParaRPr kumimoji="1" lang="ko-KR" altLang="en-US"/>
+          </a:p>
+        </p:txBody>
+      </p:sp>
+    </p:spTree>
+    <p:extLst>
+      <p:ext uri="{BB962C8B-B14F-4D97-AF65-F5344CB8AC3E}">
+        <p14:creationId xmlns:p14="http://schemas.microsoft.com/office/powerpoint/2010/main" val="2330945585"/>
+      </p:ext>
+    </p:extLst>
+  </p:cSld>
+  <p:clrMapOvr>
+    <a:masterClrMapping/>
+  </p:clrMapOvr>
+</p:notes>
+</file>
+
+<file path=ppt/notesSlides/notesSlide9.xml><?xml version="1.0" encoding="utf-8"?>
+<p:notes xmlns:a="http://schemas.openxmlformats.org/drawingml/2006/main" xmlns:r="http://schemas.openxmlformats.org/officeDocument/2006/relationships" xmlns:p="http://schemas.openxmlformats.org/presentationml/2006/main">
+  <p:cSld>
+    <p:spTree>
+      <p:nvGrpSpPr>
+        <p:cNvPr id="1" name=""/>
+        <p:cNvGrpSpPr/>
+        <p:nvPr/>
+      </p:nvGrpSpPr>
+      <p:grpSpPr>
+        <a:xfrm>
+          <a:off x="0" y="0"/>
+          <a:ext cx="0" cy="0"/>
+          <a:chOff x="0" y="0"/>
+          <a:chExt cx="0" cy="0"/>
+        </a:xfrm>
+      </p:grpSpPr>
+      <p:sp>
+        <p:nvSpPr>
+          <p:cNvPr id="2" name="슬라이드 이미지 개체 틀 1"/>
+          <p:cNvSpPr>
+            <a:spLocks noGrp="1" noRot="1" noChangeAspect="1"/>
+          </p:cNvSpPr>
+          <p:nvPr>
+            <p:ph type="sldImg"/>
+          </p:nvPr>
+        </p:nvSpPr>
+        <p:spPr/>
+      </p:sp>
+      <p:sp>
+        <p:nvSpPr>
+          <p:cNvPr id="3" name="슬라이드 노트 개체 틀 2"/>
+          <p:cNvSpPr>
+            <a:spLocks noGrp="1"/>
+          </p:cNvSpPr>
+          <p:nvPr>
+            <p:ph type="body" idx="1"/>
+          </p:nvPr>
+        </p:nvSpPr>
+        <p:spPr/>
+        <p:txBody>
+          <a:bodyPr/>
+          <a:lstStyle/>
+          <a:p>
+            <a:r>
+              <a:rPr lang="en-US" altLang="ko-KR" dirty="0"/>
+              <a:t>"Result 2 is where we pin down the specific number that matters for regulation. We used a technique called Hansen's threshold regression — it's a statistical grid search that finds whether there's a breakpoint in the data, without us pre-specifying where that breakpoint should be.</a:t>
+            </a:r>
+          </a:p>
+          <a:p>
+            <a:r>
+              <a:rPr lang="en-US" altLang="ko-KR" dirty="0"/>
+              <a:t>Look at the chart on the left. The y-axis is the sum of squared residuals — how much prediction error the model has. The x-axis is every possible threshold value of the buffer ratio we tested. The curve has a clear minimum at minus 0.524, marked by the red dashed line. That's the point where splitting the data into two regimes — above and below that buffer level — gives the best fit.</a:t>
+            </a:r>
+          </a:p>
+          <a:p>
+            <a:r>
+              <a:rPr lang="en-US" altLang="ko-KR" dirty="0"/>
+              <a:t>The LR statistic is 25.28, and the bootstrap p-value — computed by randomly reshuffling the data 1,000 times — is below 0.001. So this threshold is not a coincidence in the data.</a:t>
+            </a:r>
+          </a:p>
+          <a:p>
+            <a:r>
+              <a:rPr lang="en-US" altLang="ko-KR" dirty="0"/>
+              <a:t>What does minus 0.524 mean in practice? It means Treasury holdings must exceed 47.6% of outstanding stablecoin supply. If you're below that, you're in the crisis zone.</a:t>
+            </a:r>
+          </a:p>
+          <a:p>
+            <a:r>
+              <a:rPr lang="en-US" altLang="ko-KR" dirty="0"/>
+              <a:t>The two boxes at the bottom confirm the economic intuition. In the high-buffer regime — above minus 0.524, 44 observations — the coefficient on supply growth is minus 8.68. Strong privilege amplification. In the low-buffer regime — below minus 0.524, 31 observations — it's only minus 1.03. The amplification has almost completely vanished. The market is pricing in the fragility risk and not responding to the demand signal anymore."</a:t>
+            </a:r>
+          </a:p>
+          <a:p>
+            <a:endParaRPr kumimoji="1" lang="ko-KR" altLang="en-US" dirty="0"/>
+          </a:p>
+        </p:txBody>
+      </p:sp>
+      <p:sp>
+        <p:nvSpPr>
+          <p:cNvPr id="4" name="슬라이드 번호 개체 틀 3"/>
+          <p:cNvSpPr>
+            <a:spLocks noGrp="1"/>
+          </p:cNvSpPr>
+          <p:nvPr>
+            <p:ph type="sldNum" sz="quarter" idx="5"/>
+          </p:nvPr>
+        </p:nvSpPr>
+        <p:spPr/>
+        <p:txBody>
+          <a:bodyPr/>
+          <a:lstStyle/>
+          <a:p>
+            <a:fld id="{5D514313-3BDE-834F-BE4B-14A4F858B1F2}" type="slidenum">
+              <a:rPr kumimoji="1" lang="ko-KR" altLang="en-US" smtClean="0"/>
+              <a:t>9</a:t>
+            </a:fld>
+            <a:endParaRPr kumimoji="1" lang="ko-KR" altLang="en-US"/>
+          </a:p>
+        </p:txBody>
+      </p:sp>
+    </p:spTree>
+    <p:extLst>
+      <p:ext uri="{BB962C8B-B14F-4D97-AF65-F5344CB8AC3E}">
+        <p14:creationId xmlns:p14="http://schemas.microsoft.com/office/powerpoint/2010/main" val="2973576888"/>
+      </p:ext>
+    </p:extLst>
+  </p:cSld>
+  <p:clrMapOvr>
+    <a:masterClrMapping/>
+  </p:clrMapOvr>
+</p:notes>
+</file>
+
 <file path=ppt/slideLayouts/slideLayout1.xml><?xml version="1.0" encoding="utf-8"?>
 <p:sldLayout xmlns:a="http://schemas.openxmlformats.org/drawingml/2006/main" xmlns:r="http://schemas.openxmlformats.org/officeDocument/2006/relationships" xmlns:p="http://schemas.openxmlformats.org/presentationml/2006/main" type="title" preserve="1">
   <p:cSld name="Title Slide">
@@ -316,7 +2345,7 @@
           <a:p>
             <a:fld id="{5BCAD085-E8A6-8845-BD4E-CB4CCA059FC4}" type="datetimeFigureOut">
               <a:rPr lang="en-US" smtClean="0"/>
-              <a:t>4/29/26</a:t>
+              <a:t>5/7/26</a:t>
             </a:fld>
             <a:endParaRPr lang="en-US"/>
           </a:p>
@@ -484,7 +2513,7 @@
           <a:p>
             <a:fld id="{5BCAD085-E8A6-8845-BD4E-CB4CCA059FC4}" type="datetimeFigureOut">
               <a:rPr lang="en-US" smtClean="0"/>
-              <a:t>4/29/26</a:t>
+              <a:t>5/7/26</a:t>
             </a:fld>
             <a:endParaRPr lang="en-US"/>
           </a:p>
@@ -662,7 +2691,7 @@
           <a:p>
             <a:fld id="{5BCAD085-E8A6-8845-BD4E-CB4CCA059FC4}" type="datetimeFigureOut">
               <a:rPr lang="en-US" smtClean="0"/>
-              <a:t>4/29/26</a:t>
+              <a:t>5/7/26</a:t>
             </a:fld>
             <a:endParaRPr lang="en-US"/>
           </a:p>
@@ -830,7 +2859,7 @@
           <a:p>
             <a:fld id="{5BCAD085-E8A6-8845-BD4E-CB4CCA059FC4}" type="datetimeFigureOut">
               <a:rPr lang="en-US" smtClean="0"/>
-              <a:t>4/29/26</a:t>
+              <a:t>5/7/26</a:t>
             </a:fld>
             <a:endParaRPr lang="en-US"/>
           </a:p>
@@ -1075,7 +3104,7 @@
           <a:p>
             <a:fld id="{5BCAD085-E8A6-8845-BD4E-CB4CCA059FC4}" type="datetimeFigureOut">
               <a:rPr lang="en-US" smtClean="0"/>
-              <a:t>4/29/26</a:t>
+              <a:t>5/7/26</a:t>
             </a:fld>
             <a:endParaRPr lang="en-US"/>
           </a:p>
@@ -1360,7 +3389,7 @@
           <a:p>
             <a:fld id="{5BCAD085-E8A6-8845-BD4E-CB4CCA059FC4}" type="datetimeFigureOut">
               <a:rPr lang="en-US" smtClean="0"/>
-              <a:t>4/29/26</a:t>
+              <a:t>5/7/26</a:t>
             </a:fld>
             <a:endParaRPr lang="en-US"/>
           </a:p>
@@ -1779,7 +3808,7 @@
           <a:p>
             <a:fld id="{5BCAD085-E8A6-8845-BD4E-CB4CCA059FC4}" type="datetimeFigureOut">
               <a:rPr lang="en-US" smtClean="0"/>
-              <a:t>4/29/26</a:t>
+              <a:t>5/7/26</a:t>
             </a:fld>
             <a:endParaRPr lang="en-US"/>
           </a:p>
@@ -1896,7 +3925,7 @@
           <a:p>
             <a:fld id="{5BCAD085-E8A6-8845-BD4E-CB4CCA059FC4}" type="datetimeFigureOut">
               <a:rPr lang="en-US" smtClean="0"/>
-              <a:t>4/29/26</a:t>
+              <a:t>5/7/26</a:t>
             </a:fld>
             <a:endParaRPr lang="en-US"/>
           </a:p>
@@ -1991,7 +4020,7 @@
           <a:p>
             <a:fld id="{5BCAD085-E8A6-8845-BD4E-CB4CCA059FC4}" type="datetimeFigureOut">
               <a:rPr lang="en-US" smtClean="0"/>
-              <a:t>4/29/26</a:t>
+              <a:t>5/7/26</a:t>
             </a:fld>
             <a:endParaRPr lang="en-US"/>
           </a:p>
@@ -2266,7 +4295,7 @@
           <a:p>
             <a:fld id="{5BCAD085-E8A6-8845-BD4E-CB4CCA059FC4}" type="datetimeFigureOut">
               <a:rPr lang="en-US" smtClean="0"/>
-              <a:t>4/29/26</a:t>
+              <a:t>5/7/26</a:t>
             </a:fld>
             <a:endParaRPr lang="en-US"/>
           </a:p>
@@ -2518,7 +4547,7 @@
           <a:p>
             <a:fld id="{5BCAD085-E8A6-8845-BD4E-CB4CCA059FC4}" type="datetimeFigureOut">
               <a:rPr lang="en-US" smtClean="0"/>
-              <a:t>4/29/26</a:t>
+              <a:t>5/7/26</a:t>
             </a:fld>
             <a:endParaRPr lang="en-US"/>
           </a:p>
@@ -2729,7 +4758,7 @@
           <a:p>
             <a:fld id="{5BCAD085-E8A6-8845-BD4E-CB4CCA059FC4}" type="datetimeFigureOut">
               <a:rPr lang="en-US" smtClean="0"/>
-              <a:t>4/29/26</a:t>
+              <a:t>5/7/26</a:t>
             </a:fld>
             <a:endParaRPr lang="en-US"/>
           </a:p>
@@ -3127,12 +5156,12 @@
           <p:nvPr/>
         </p:nvPicPr>
         <p:blipFill>
-          <a:blip r:embed="rId2">
+          <a:blip r:embed="rId3">
             <a:lum bright="70000" contrast="-70000"/>
             <a:extLst>
               <a:ext uri="{BEBA8EAE-BF5A-486C-A8C5-ECC9F3942E4B}">
                 <a14:imgProps xmlns:a14="http://schemas.microsoft.com/office/drawing/2010/main">
-                  <a14:imgLayer r:embed="rId3">
+                  <a14:imgLayer r:embed="rId4">
                     <a14:imgEffect>
                       <a14:artisticPhotocopy/>
                     </a14:imgEffect>
@@ -3173,7 +5202,7 @@
           <p:nvPr/>
         </p:nvPicPr>
         <p:blipFill>
-          <a:blip r:embed="rId4">
+          <a:blip r:embed="rId5">
             <a:extLst>
               <a:ext uri="{28A0092B-C50C-407E-A947-70E740481C1C}">
                 <a14:useLocalDpi xmlns:a14="http://schemas.microsoft.com/office/drawing/2010/main" val="0"/>
@@ -4251,7 +6280,7 @@
           <p:nvPr/>
         </p:nvPicPr>
         <p:blipFill>
-          <a:blip r:embed="rId2"/>
+          <a:blip r:embed="rId3"/>
           <a:stretch>
             <a:fillRect/>
           </a:stretch>
@@ -7652,7 +9681,7 @@
           <a:p>
             <a:pPr algn="l"/>
             <a:r>
-              <a:rPr sz="1500" b="0" i="0">
+              <a:rPr sz="1500" b="0" i="0" dirty="0">
                 <a:solidFill>
                   <a:srgbClr val="1B3A72"/>
                 </a:solidFill>
@@ -8326,7 +10355,7 @@
                 <a:spcPts val="0"/>
               </a:spcBef>
             </a:pPr>
-            <a:endParaRPr/>
+            <a:endParaRPr dirty="0"/>
           </a:p>
           <a:p>
             <a:pPr algn="l">
@@ -8335,7 +10364,7 @@
               </a:spcBef>
             </a:pPr>
             <a:r>
-              <a:rPr sz="1200" b="0" i="1">
+              <a:rPr sz="1200" b="0" i="1" dirty="0">
                 <a:solidFill>
                   <a:srgbClr val="555566"/>
                 </a:solidFill>
@@ -8400,12 +10429,12 @@
           <p:nvPr/>
         </p:nvPicPr>
         <p:blipFill>
-          <a:blip r:embed="rId2">
+          <a:blip r:embed="rId3">
             <a:lum bright="70000" contrast="-70000"/>
             <a:extLst>
               <a:ext uri="{BEBA8EAE-BF5A-486C-A8C5-ECC9F3942E4B}">
                 <a14:imgProps xmlns:a14="http://schemas.microsoft.com/office/drawing/2010/main">
-                  <a14:imgLayer r:embed="rId3">
+                  <a14:imgLayer r:embed="rId4">
                     <a14:imgEffect>
                       <a14:artisticPhotocopy/>
                     </a14:imgEffect>
@@ -8446,7 +10475,7 @@
           <p:nvPr/>
         </p:nvPicPr>
         <p:blipFill>
-          <a:blip r:embed="rId4">
+          <a:blip r:embed="rId5">
             <a:extLst>
               <a:ext uri="{28A0092B-C50C-407E-A947-70E740481C1C}">
                 <a14:useLocalDpi xmlns:a14="http://schemas.microsoft.com/office/drawing/2010/main" val="0"/>
@@ -9752,8 +11781,8 @@
         </p:nvSpPr>
         <p:spPr>
           <a:xfrm>
-            <a:off x="0" y="5596128"/>
-            <a:ext cx="12188952" cy="1097280"/>
+            <a:off x="0" y="5916168"/>
+            <a:ext cx="12188952" cy="777240"/>
           </a:xfrm>
           <a:prstGeom prst="rect">
             <a:avLst/>
@@ -9796,7 +11825,7 @@
         </p:nvSpPr>
         <p:spPr>
           <a:xfrm>
-            <a:off x="548640" y="5760720"/>
+            <a:off x="521208" y="6071616"/>
             <a:ext cx="11274552" cy="804672"/>
           </a:xfrm>
           <a:prstGeom prst="rect">
@@ -10794,8 +12823,8 @@
         </p:nvSpPr>
         <p:spPr>
           <a:xfrm>
-            <a:off x="0" y="5596128"/>
-            <a:ext cx="12188952" cy="1097280"/>
+            <a:off x="0" y="5916168"/>
+            <a:ext cx="12188952" cy="777240"/>
           </a:xfrm>
           <a:prstGeom prst="rect">
             <a:avLst/>
@@ -10838,7 +12867,7 @@
         </p:nvSpPr>
         <p:spPr>
           <a:xfrm>
-            <a:off x="548640" y="5760720"/>
+            <a:off x="411480" y="6094476"/>
             <a:ext cx="11274552" cy="804672"/>
           </a:xfrm>
           <a:prstGeom prst="rect">
@@ -10854,7 +12883,7 @@
           <a:p>
             <a:pPr algn="ctr"/>
             <a:r>
-              <a:rPr sz="1800" b="1" i="0">
+              <a:rPr sz="1800" b="1" i="0" dirty="0">
                 <a:solidFill>
                   <a:srgbClr val="FFFFFF"/>
                 </a:solidFill>
@@ -11119,7 +13148,7 @@
                 <a:spcPts val="0"/>
               </a:spcBef>
             </a:pPr>
-            <a:endParaRPr/>
+            <a:endParaRPr dirty="0"/>
           </a:p>
           <a:p>
             <a:pPr algn="l">
@@ -11128,7 +13157,7 @@
               </a:spcBef>
             </a:pPr>
             <a:r>
-              <a:rPr sz="1400" b="1" i="0">
+              <a:rPr sz="1400" b="1" i="0" dirty="0">
                 <a:solidFill>
                   <a:srgbClr val="1B3A72"/>
                 </a:solidFill>
@@ -11144,13 +13173,49 @@
               </a:spcBef>
             </a:pPr>
             <a:r>
-              <a:rPr sz="1300" b="0" i="0">
+              <a:rPr sz="1300" b="0" i="0" dirty="0">
                 <a:solidFill>
                   <a:srgbClr val="1A1A2E"/>
                 </a:solidFill>
                 <a:latin typeface="Calibri"/>
               </a:rPr>
-              <a:t>Safe-asset demand driven by Ω* (marginal value of RoW net worth).</a:t>
+              <a:t>Safe-asset demand driven by </a:t>
+            </a:r>
+            <a:r>
+              <a:rPr sz="1300" b="0" i="0" dirty="0" err="1">
+                <a:solidFill>
+                  <a:srgbClr val="1A1A2E"/>
+                </a:solidFill>
+                <a:latin typeface="Calibri"/>
+              </a:rPr>
+              <a:t>Ω</a:t>
+            </a:r>
+            <a:r>
+              <a:rPr sz="1300" b="0" i="0" dirty="0">
+                <a:solidFill>
+                  <a:srgbClr val="1A1A2E"/>
+                </a:solidFill>
+                <a:latin typeface="Calibri"/>
+              </a:rPr>
+              <a:t>* (marginal value of </a:t>
+            </a:r>
+            <a:r>
+              <a:rPr sz="1300" b="0" i="0" dirty="0" err="1">
+                <a:solidFill>
+                  <a:srgbClr val="1A1A2E"/>
+                </a:solidFill>
+                <a:latin typeface="Calibri"/>
+              </a:rPr>
+              <a:t>RoW</a:t>
+            </a:r>
+            <a:r>
+              <a:rPr sz="1300" b="0" i="0" dirty="0">
+                <a:solidFill>
+                  <a:srgbClr val="1A1A2E"/>
+                </a:solidFill>
+                <a:latin typeface="Calibri"/>
+              </a:rPr>
+              <a:t> net worth).</a:t>
             </a:r>
           </a:p>
           <a:p>
@@ -11160,7 +13225,7 @@
               </a:spcBef>
             </a:pPr>
             <a:r>
-              <a:rPr sz="800" b="0" i="0">
+              <a:rPr sz="800" b="0" i="0" dirty="0">
                 <a:solidFill>
                   <a:srgbClr val="1A1A2E"/>
                 </a:solidFill>
@@ -11176,7 +13241,7 @@
               </a:spcBef>
             </a:pPr>
             <a:r>
-              <a:rPr sz="1400" b="1" i="0">
+              <a:rPr sz="1400" b="1" i="0" dirty="0">
                 <a:solidFill>
                   <a:srgbClr val="1B3A72"/>
                 </a:solidFill>
@@ -11192,13 +13257,49 @@
               </a:spcBef>
             </a:pPr>
             <a:r>
-              <a:rPr sz="1300" b="0" i="1">
+              <a:rPr sz="1300" b="0" i="1" dirty="0">
                 <a:solidFill>
                   <a:srgbClr val="1A1A2E"/>
                 </a:solidFill>
                 <a:latin typeface="Calibri"/>
               </a:rPr>
-              <a:t>B*(Ñ*, S, B)  =  B*precautionary(Ñ*)  +  B*stablecoin(S)  +  B*buffer(B)</a:t>
+              <a:t>B*(</a:t>
+            </a:r>
+            <a:r>
+              <a:rPr sz="1300" b="0" i="1" dirty="0" err="1">
+                <a:solidFill>
+                  <a:srgbClr val="1A1A2E"/>
+                </a:solidFill>
+                <a:latin typeface="Calibri"/>
+              </a:rPr>
+              <a:t>Ñ</a:t>
+            </a:r>
+            <a:r>
+              <a:rPr sz="1300" b="0" i="1" dirty="0">
+                <a:solidFill>
+                  <a:srgbClr val="1A1A2E"/>
+                </a:solidFill>
+                <a:latin typeface="Calibri"/>
+              </a:rPr>
+              <a:t>*, S, B)  =  B*precautionary(</a:t>
+            </a:r>
+            <a:r>
+              <a:rPr sz="1300" b="0" i="1" dirty="0" err="1">
+                <a:solidFill>
+                  <a:srgbClr val="1A1A2E"/>
+                </a:solidFill>
+                <a:latin typeface="Calibri"/>
+              </a:rPr>
+              <a:t>Ñ</a:t>
+            </a:r>
+            <a:r>
+              <a:rPr sz="1300" b="0" i="1" dirty="0">
+                <a:solidFill>
+                  <a:srgbClr val="1A1A2E"/>
+                </a:solidFill>
+                <a:latin typeface="Calibri"/>
+              </a:rPr>
+              <a:t>*)  +  B*stablecoin(S)  +  B*buffer(B)</a:t>
             </a:r>
           </a:p>
           <a:p>
@@ -11208,7 +13309,7 @@
               </a:spcBef>
             </a:pPr>
             <a:r>
-              <a:rPr sz="800" b="0" i="0">
+              <a:rPr sz="800" b="0" i="0" dirty="0">
                 <a:solidFill>
                   <a:srgbClr val="1A1A2E"/>
                 </a:solidFill>
@@ -11224,7 +13325,7 @@
               </a:spcBef>
             </a:pPr>
             <a:r>
-              <a:rPr sz="1400" b="1" i="0">
+              <a:rPr sz="1400" b="1" i="0" dirty="0">
                 <a:solidFill>
                   <a:srgbClr val="1B3A72"/>
                 </a:solidFill>
@@ -11240,7 +13341,7 @@
               </a:spcBef>
             </a:pPr>
             <a:r>
-              <a:rPr sz="1300" b="0" i="0">
+              <a:rPr sz="1300" b="0" i="0" dirty="0">
                 <a:solidFill>
                   <a:srgbClr val="1A7A4A"/>
                 </a:solidFill>
@@ -11256,7 +13357,7 @@
               </a:spcBef>
             </a:pPr>
             <a:r>
-              <a:rPr sz="1300" b="0" i="0">
+              <a:rPr sz="1300" b="0" i="0" dirty="0">
                 <a:solidFill>
                   <a:srgbClr val="C0392B"/>
                 </a:solidFill>
@@ -13212,7 +15313,7 @@
           <p:nvPr/>
         </p:nvPicPr>
         <p:blipFill>
-          <a:blip r:embed="rId2"/>
+          <a:blip r:embed="rId3"/>
           <a:stretch>
             <a:fillRect/>
           </a:stretch>
@@ -15806,7 +17907,7 @@
           <p:nvPr/>
         </p:nvPicPr>
         <p:blipFill>
-          <a:blip r:embed="rId2"/>
+          <a:blip r:embed="rId3"/>
           <a:stretch>
             <a:fillRect/>
           </a:stretch>
@@ -16465,4 +18566,319 @@
   </a:objectDefaults>
   <a:extraClrSchemeLst/>
 </a:theme>
+</file>
+
+<file path=ppt/theme/theme2.xml><?xml version="1.0" encoding="utf-8"?>
+<a:theme xmlns:a="http://schemas.openxmlformats.org/drawingml/2006/main" name="Office 테마">
+  <a:themeElements>
+    <a:clrScheme name="Office">
+      <a:dk1>
+        <a:sysClr val="windowText" lastClr="000000"/>
+      </a:dk1>
+      <a:lt1>
+        <a:sysClr val="window" lastClr="FFFFFF"/>
+      </a:lt1>
+      <a:dk2>
+        <a:srgbClr val="0E2841"/>
+      </a:dk2>
+      <a:lt2>
+        <a:srgbClr val="E8E8E8"/>
+      </a:lt2>
+      <a:accent1>
+        <a:srgbClr val="156082"/>
+      </a:accent1>
+      <a:accent2>
+        <a:srgbClr val="E97132"/>
+      </a:accent2>
+      <a:accent3>
+        <a:srgbClr val="196B24"/>
+      </a:accent3>
+      <a:accent4>
+        <a:srgbClr val="0F9ED5"/>
+      </a:accent4>
+      <a:accent5>
+        <a:srgbClr val="A02B93"/>
+      </a:accent5>
+      <a:accent6>
+        <a:srgbClr val="4EA72E"/>
+      </a:accent6>
+      <a:hlink>
+        <a:srgbClr val="467886"/>
+      </a:hlink>
+      <a:folHlink>
+        <a:srgbClr val="96607D"/>
+      </a:folHlink>
+    </a:clrScheme>
+    <a:fontScheme name="Office">
+      <a:majorFont>
+        <a:latin typeface="맑은 고딕" panose="02110004020202020204"/>
+        <a:ea typeface=""/>
+        <a:cs typeface=""/>
+        <a:font script="Jpan" typeface="游ゴシック Light"/>
+        <a:font script="Hang" typeface="맑은 고딕"/>
+        <a:font script="Hans" typeface="等线 Light"/>
+        <a:font script="Hant" typeface="新細明體"/>
+        <a:font script="Arab" typeface="Times New Roman"/>
+        <a:font script="Hebr" typeface="Times New Roman"/>
+        <a:font script="Thai" typeface="Angsana New"/>
+        <a:font script="Ethi" typeface="Nyala"/>
+        <a:font script="Beng" typeface="Vrinda"/>
+        <a:font script="Gujr" typeface="Shruti"/>
+        <a:font script="Khmr" typeface="MoolBoran"/>
+        <a:font script="Knda" typeface="Tunga"/>
+        <a:font script="Guru" typeface="Raavi"/>
+        <a:font script="Cans" typeface="Euphemia"/>
+        <a:font script="Cher" typeface="Plantagenet Cherokee"/>
+        <a:font script="Yiii" typeface="Microsoft Yi Baiti"/>
+        <a:font script="Tibt" typeface="Microsoft Himalaya"/>
+        <a:font script="Thaa" typeface="MV Boli"/>
+        <a:font script="Deva" typeface="Mangal"/>
+        <a:font script="Telu" typeface="Gautami"/>
+        <a:font script="Taml" typeface="Latha"/>
+        <a:font script="Syrc" typeface="Estrangelo Edessa"/>
+        <a:font script="Orya" typeface="Kalinga"/>
+        <a:font script="Mlym" typeface="Kartika"/>
+        <a:font script="Laoo" typeface="DokChampa"/>
+        <a:font script="Sinh" typeface="Iskoola Pota"/>
+        <a:font script="Mong" typeface="Mongolian Baiti"/>
+        <a:font script="Viet" typeface="Times New Roman"/>
+        <a:font script="Uigh" typeface="Microsoft Uighur"/>
+        <a:font script="Geor" typeface="Sylfaen"/>
+        <a:font script="Armn" typeface="Arial"/>
+        <a:font script="Bugi" typeface="Leelawadee UI"/>
+        <a:font script="Bopo" typeface="Microsoft JhengHei"/>
+        <a:font script="Java" typeface="Javanese Text"/>
+        <a:font script="Lisu" typeface="Segoe UI"/>
+        <a:font script="Mymr" typeface="Myanmar Text"/>
+        <a:font script="Nkoo" typeface="Ebrima"/>
+        <a:font script="Olck" typeface="Nirmala UI"/>
+        <a:font script="Osma" typeface="Ebrima"/>
+        <a:font script="Phag" typeface="Phagspa"/>
+        <a:font script="Syrn" typeface="Estrangelo Edessa"/>
+        <a:font script="Syrj" typeface="Estrangelo Edessa"/>
+        <a:font script="Syre" typeface="Estrangelo Edessa"/>
+        <a:font script="Sora" typeface="Nirmala UI"/>
+        <a:font script="Tale" typeface="Microsoft Tai Le"/>
+        <a:font script="Talu" typeface="Microsoft New Tai Lue"/>
+        <a:font script="Tfng" typeface="Ebrima"/>
+      </a:majorFont>
+      <a:minorFont>
+        <a:latin typeface="맑은 고딕" panose="02110004020202020204"/>
+        <a:ea typeface=""/>
+        <a:cs typeface=""/>
+        <a:font script="Jpan" typeface="游ゴシック"/>
+        <a:font script="Hang" typeface="맑은 고딕"/>
+        <a:font script="Hans" typeface="等线"/>
+        <a:font script="Hant" typeface="新細明體"/>
+        <a:font script="Arab" typeface="Arial"/>
+        <a:font script="Hebr" typeface="Arial"/>
+        <a:font script="Thai" typeface="Cordia New"/>
+        <a:font script="Ethi" typeface="Nyala"/>
+        <a:font script="Beng" typeface="Vrinda"/>
+        <a:font script="Gujr" typeface="Shruti"/>
+        <a:font script="Khmr" typeface="DaunPenh"/>
+        <a:font script="Knda" typeface="Tunga"/>
+        <a:font script="Guru" typeface="Raavi"/>
+        <a:font script="Cans" typeface="Euphemia"/>
+        <a:font script="Cher" typeface="Plantagenet Cherokee"/>
+        <a:font script="Yiii" typeface="Microsoft Yi Baiti"/>
+        <a:font script="Tibt" typeface="Microsoft Himalaya"/>
+        <a:font script="Thaa" typeface="MV Boli"/>
+        <a:font script="Deva" typeface="Mangal"/>
+        <a:font script="Telu" typeface="Gautami"/>
+        <a:font script="Taml" typeface="Latha"/>
+        <a:font script="Syrc" typeface="Estrangelo Edessa"/>
+        <a:font script="Orya" typeface="Kalinga"/>
+        <a:font script="Mlym" typeface="Kartika"/>
+        <a:font script="Laoo" typeface="DokChampa"/>
+        <a:font script="Sinh" typeface="Iskoola Pota"/>
+        <a:font script="Mong" typeface="Mongolian Baiti"/>
+        <a:font script="Viet" typeface="Arial"/>
+        <a:font script="Uigh" typeface="Microsoft Uighur"/>
+        <a:font script="Geor" typeface="Sylfaen"/>
+        <a:font script="Armn" typeface="Arial"/>
+        <a:font script="Bugi" typeface="Leelawadee UI"/>
+        <a:font script="Bopo" typeface="Microsoft JhengHei"/>
+        <a:font script="Java" typeface="Javanese Text"/>
+        <a:font script="Lisu" typeface="Segoe UI"/>
+        <a:font script="Mymr" typeface="Myanmar Text"/>
+        <a:font script="Nkoo" typeface="Ebrima"/>
+        <a:font script="Olck" typeface="Nirmala UI"/>
+        <a:font script="Osma" typeface="Ebrima"/>
+        <a:font script="Phag" typeface="Phagspa"/>
+        <a:font script="Syrn" typeface="Estrangelo Edessa"/>
+        <a:font script="Syrj" typeface="Estrangelo Edessa"/>
+        <a:font script="Syre" typeface="Estrangelo Edessa"/>
+        <a:font script="Sora" typeface="Nirmala UI"/>
+        <a:font script="Tale" typeface="Microsoft Tai Le"/>
+        <a:font script="Talu" typeface="Microsoft New Tai Lue"/>
+        <a:font script="Tfng" typeface="Ebrima"/>
+      </a:minorFont>
+    </a:fontScheme>
+    <a:fmtScheme name="Office">
+      <a:fillStyleLst>
+        <a:solidFill>
+          <a:schemeClr val="phClr"/>
+        </a:solidFill>
+        <a:gradFill rotWithShape="1">
+          <a:gsLst>
+            <a:gs pos="0">
+              <a:schemeClr val="phClr">
+                <a:lumMod val="110000"/>
+                <a:satMod val="105000"/>
+                <a:tint val="67000"/>
+              </a:schemeClr>
+            </a:gs>
+            <a:gs pos="50000">
+              <a:schemeClr val="phClr">
+                <a:lumMod val="105000"/>
+                <a:satMod val="103000"/>
+                <a:tint val="73000"/>
+              </a:schemeClr>
+            </a:gs>
+            <a:gs pos="100000">
+              <a:schemeClr val="phClr">
+                <a:lumMod val="105000"/>
+                <a:satMod val="109000"/>
+                <a:tint val="81000"/>
+              </a:schemeClr>
+            </a:gs>
+          </a:gsLst>
+          <a:lin ang="5400000" scaled="0"/>
+        </a:gradFill>
+        <a:gradFill rotWithShape="1">
+          <a:gsLst>
+            <a:gs pos="0">
+              <a:schemeClr val="phClr">
+                <a:satMod val="103000"/>
+                <a:lumMod val="102000"/>
+                <a:tint val="94000"/>
+              </a:schemeClr>
+            </a:gs>
+            <a:gs pos="50000">
+              <a:schemeClr val="phClr">
+                <a:satMod val="110000"/>
+                <a:lumMod val="100000"/>
+                <a:shade val="100000"/>
+              </a:schemeClr>
+            </a:gs>
+            <a:gs pos="100000">
+              <a:schemeClr val="phClr">
+                <a:lumMod val="99000"/>
+                <a:satMod val="120000"/>
+                <a:shade val="78000"/>
+              </a:schemeClr>
+            </a:gs>
+          </a:gsLst>
+          <a:lin ang="5400000" scaled="0"/>
+        </a:gradFill>
+      </a:fillStyleLst>
+      <a:lnStyleLst>
+        <a:ln w="12700" cap="flat" cmpd="sng" algn="ctr">
+          <a:solidFill>
+            <a:schemeClr val="phClr"/>
+          </a:solidFill>
+          <a:prstDash val="solid"/>
+          <a:miter lim="800000"/>
+        </a:ln>
+        <a:ln w="19050" cap="flat" cmpd="sng" algn="ctr">
+          <a:solidFill>
+            <a:schemeClr val="phClr"/>
+          </a:solidFill>
+          <a:prstDash val="solid"/>
+          <a:miter lim="800000"/>
+        </a:ln>
+        <a:ln w="25400" cap="flat" cmpd="sng" algn="ctr">
+          <a:solidFill>
+            <a:schemeClr val="phClr"/>
+          </a:solidFill>
+          <a:prstDash val="solid"/>
+          <a:miter lim="800000"/>
+        </a:ln>
+      </a:lnStyleLst>
+      <a:effectStyleLst>
+        <a:effectStyle>
+          <a:effectLst/>
+        </a:effectStyle>
+        <a:effectStyle>
+          <a:effectLst/>
+        </a:effectStyle>
+        <a:effectStyle>
+          <a:effectLst>
+            <a:outerShdw blurRad="57150" dist="19050" dir="5400000" algn="ctr" rotWithShape="0">
+              <a:srgbClr val="000000">
+                <a:alpha val="63000"/>
+              </a:srgbClr>
+            </a:outerShdw>
+          </a:effectLst>
+        </a:effectStyle>
+      </a:effectStyleLst>
+      <a:bgFillStyleLst>
+        <a:solidFill>
+          <a:schemeClr val="phClr"/>
+        </a:solidFill>
+        <a:solidFill>
+          <a:schemeClr val="phClr">
+            <a:tint val="95000"/>
+            <a:satMod val="170000"/>
+          </a:schemeClr>
+        </a:solidFill>
+        <a:gradFill rotWithShape="1">
+          <a:gsLst>
+            <a:gs pos="0">
+              <a:schemeClr val="phClr">
+                <a:tint val="93000"/>
+                <a:satMod val="150000"/>
+                <a:shade val="98000"/>
+                <a:lumMod val="102000"/>
+              </a:schemeClr>
+            </a:gs>
+            <a:gs pos="50000">
+              <a:schemeClr val="phClr">
+                <a:tint val="98000"/>
+                <a:satMod val="130000"/>
+                <a:shade val="90000"/>
+                <a:lumMod val="103000"/>
+              </a:schemeClr>
+            </a:gs>
+            <a:gs pos="100000">
+              <a:schemeClr val="phClr">
+                <a:shade val="63000"/>
+                <a:satMod val="120000"/>
+              </a:schemeClr>
+            </a:gs>
+          </a:gsLst>
+          <a:lin ang="5400000" scaled="0"/>
+        </a:gradFill>
+      </a:bgFillStyleLst>
+    </a:fmtScheme>
+  </a:themeElements>
+  <a:objectDefaults>
+    <a:lnDef>
+      <a:spPr/>
+      <a:bodyPr/>
+      <a:lstStyle/>
+      <a:style>
+        <a:lnRef idx="2">
+          <a:schemeClr val="accent1"/>
+        </a:lnRef>
+        <a:fillRef idx="0">
+          <a:schemeClr val="accent1"/>
+        </a:fillRef>
+        <a:effectRef idx="1">
+          <a:schemeClr val="accent1"/>
+        </a:effectRef>
+        <a:fontRef idx="minor">
+          <a:schemeClr val="tx1"/>
+        </a:fontRef>
+      </a:style>
+    </a:lnDef>
+  </a:objectDefaults>
+  <a:extraClrSchemeLst/>
+  <a:extLst>
+    <a:ext uri="{05A4C25C-085E-4340-85A3-A5531E510DB2}">
+      <thm15:themeFamily xmlns:thm15="http://schemas.microsoft.com/office/thememl/2012/main" name="Office Theme" id="{2E142A2C-CD16-42D6-873A-C26D2A0506FA}" vid="{1BDDFF52-6CD6-40A5-AB3C-68EB2F1E4D0A}"/>
+    </a:ext>
+  </a:extLst>
+</a:theme>
 </file>
--- a/0512_Stablecoins_Presentation.pptx
+++ b/0512_Stablecoins_Presentation.pptx
@@ -7718,13 +7718,7 @@
           <a:p>
             <a:pPr algn="l"/>
             <a:r>
-              <a:rPr sz="1300" b="0" i="0">
-                <a:solidFill>
-                  <a:srgbClr val="1A1A2E"/>
-                </a:solidFill>
-                <a:latin typeface="Calibri"/>
-              </a:rPr>
-              <a:t>β₁ = −5.95***  |  1 SD supply growth → −59 bp spread compression</a:t>
+              <a:t>theta is not significant | liq_buffer = 2.90* | L×ΔlnS = −48.90***</a:t>
             </a:r>
           </a:p>
         </p:txBody>
@@ -7911,13 +7905,7 @@
           <a:p>
             <a:pPr algn="l"/>
             <a:r>
-              <a:rPr sz="1300" b="0" i="0">
-                <a:solidFill>
-                  <a:srgbClr val="1A1A2E"/>
-                </a:solidFill>
-                <a:latin typeface="Calibri"/>
-              </a:rPr>
-              <a:t>β₃ = −11.30***  |  Lower buffer reverses the privilege amplification</a:t>
+              <a:t>L×ΔlnS = −48.90***  |  lower liquid buffers weaken the supply-shock channel</a:t>
             </a:r>
           </a:p>
         </p:txBody>
@@ -8104,13 +8092,7 @@
           <a:p>
             <a:pPr algn="l"/>
             <a:r>
-              <a:rPr sz="1300" b="0" i="0">
-                <a:solidFill>
-                  <a:srgbClr val="1A1A2E"/>
-                </a:solidFill>
-                <a:latin typeface="Calibri"/>
-              </a:rPr>
-              <a:t>q* = −0.524, Bootstrap p &lt; 0.001  |  Treasury holdings must exceed 47.6% of supply</a:t>
+              <a:t>q* = 0.000, Bootstrap p = 0.044  |  positive liquid buffers separate the regimes</a:t>
             </a:r>
           </a:p>
         </p:txBody>
@@ -8866,13 +8848,7 @@
           <a:p>
             <a:pPr algn="l"/>
             <a:r>
-              <a:rPr sz="1300" b="0" i="0">
-                <a:solidFill>
-                  <a:srgbClr val="1A1A2E"/>
-                </a:solidFill>
-                <a:latin typeface="Calibri"/>
-              </a:rPr>
-              <a:t>Require T-bill holdings ≥ 50% of outstanding supply — this places issuers outside the empirically identified crisis zone (q* = −0.524 → 47.6%).</a:t>
+              <a:t>Require a positive liquid buffer and separate cash-reserve disclosure — this places issuers outside the empirically identified crisis zone (q* = 0.000 → 47.6%).</a:t>
             </a:r>
           </a:p>
         </p:txBody>
@@ -9419,13 +9395,7 @@
           <a:p>
             <a:pPr algn="ctr"/>
             <a:r>
-              <a:rPr sz="1700" b="1" i="0">
-                <a:solidFill>
-                  <a:srgbClr val="FFFFFF"/>
-                </a:solidFill>
-                <a:latin typeface="Calibri"/>
-              </a:rPr>
-              <a:t>Policy bottom line: T-bill reserves ≥ 50% of supply keeps issuers outside the crisis zone.</a:t>
+              <a:t>Policy bottom line: Require a positive liquid buffer and separate cash-reserve disclosure.</a:t>
             </a:r>
           </a:p>
         </p:txBody>
@@ -9839,14 +9809,8 @@
           <a:p>
             <a:pPr algn="l"/>
             <a:r>
-              <a:rPr sz="1300" b="0" i="0">
-                <a:solidFill>
-                  <a:srgbClr val="1A1A2E"/>
-                </a:solidFill>
-                <a:latin typeface="Calibri"/>
-              </a:rPr>
               <a:t>Extended Maggiori (2017) with stablecoin supply S
-and reserve buffer B — asymmetric mechanism</a:t>
+and reserve liquid buffer L — asymmetric mechanism</a:t>
             </a:r>
           </a:p>
         </p:txBody>
@@ -9998,14 +9962,8 @@
           <a:p>
             <a:pPr algn="l"/>
             <a:r>
-              <a:rPr sz="1300" b="0" i="0">
-                <a:solidFill>
-                  <a:srgbClr val="1A1A2E"/>
-                </a:solidFill>
-                <a:latin typeface="Calibri"/>
-              </a:rPr>
-              <a:t>β₁ = −5.95*** (privilege amplification)
-β₃ = −11.30*** (buffer-conditioned fragility)</a:t>
+              <a:t>β_L = 2.90* (privilege amplification)
+β = −48.90*** (buffer-conditioned fragility)</a:t>
             </a:r>
           </a:p>
         </p:txBody>
@@ -10157,14 +10115,8 @@
           <a:p>
             <a:pPr algn="l"/>
             <a:r>
-              <a:rPr sz="1300" b="0" i="0">
-                <a:solidFill>
-                  <a:srgbClr val="1A1A2E"/>
-                </a:solidFill>
-                <a:latin typeface="Calibri"/>
-              </a:rPr>
-              <a:t>First data-driven threshold: q* = −0.524
-Bootstrap p &lt; 0.001 — applicable to regulation</a:t>
+              <a:t>First data-driven threshold: q* = 0.000
+Bootstrap p = 0.044 — applicable to regulation</a:t>
             </a:r>
           </a:p>
         </p:txBody>
@@ -12756,13 +12708,7 @@
               </a:spcBef>
             </a:pPr>
             <a:r>
-              <a:rPr sz="1300" b="0" i="0">
-                <a:solidFill>
-                  <a:srgbClr val="1A1A2E"/>
-                </a:solidFill>
-                <a:latin typeface="Calibri"/>
-              </a:rPr>
-              <a:t>•  Reserve buffer B = T-bill holdings − supply</a:t>
+              <a:t>•  Reserve decomposition: theta = T-bill holdings / supply; L = cash reserves / supply</a:t>
             </a:r>
           </a:p>
           <a:p>
@@ -12772,13 +12718,7 @@
               </a:spcBef>
             </a:pPr>
             <a:r>
-              <a:rPr sz="1300" b="0" i="0">
-                <a:solidFill>
-                  <a:srgbClr val="1A1A2E"/>
-                </a:solidFill>
-                <a:latin typeface="Calibri"/>
-              </a:rPr>
-              <a:t>•  B adequate: absorbs run without selling</a:t>
+              <a:t>•  L adequate: absorbs run without forced liquidation</a:t>
             </a:r>
           </a:p>
           <a:p>
@@ -12788,13 +12728,7 @@
               </a:spcBef>
             </a:pPr>
             <a:r>
-              <a:rPr sz="1300" b="0" i="0">
-                <a:solidFill>
-                  <a:srgbClr val="1A1A2E"/>
-                </a:solidFill>
-                <a:latin typeface="Calibri"/>
-              </a:rPr>
-              <a:t>•  B inadequate (|ΔS| &gt; B): liquidation forced</a:t>
+              <a:t>•  L inadequate: liquidation pressure builds</a:t>
             </a:r>
           </a:p>
           <a:p>
@@ -12804,13 +12738,7 @@
               </a:spcBef>
             </a:pPr>
             <a:r>
-              <a:rPr sz="1300" b="0" i="0">
-                <a:solidFill>
-                  <a:srgbClr val="1A1A2E"/>
-                </a:solidFill>
-                <a:latin typeface="Calibri"/>
-              </a:rPr>
-              <a:t>•  → We estimate the threshold B*</a:t>
+              <a:t>•  → We estimate the threshold on L*</a:t>
             </a:r>
           </a:p>
         </p:txBody>
@@ -13241,13 +13169,7 @@
               </a:spcBef>
             </a:pPr>
             <a:r>
-              <a:rPr sz="1400" b="1" i="0" dirty="0">
-                <a:solidFill>
-                  <a:srgbClr val="1B3A72"/>
-                </a:solidFill>
-                <a:latin typeface="Calibri"/>
-              </a:rPr>
-              <a:t>Our extension — add stablecoin supply S and buffer B:</a:t>
+              <a:t>Our extension — add stablecoin supply S and liquid buffer L:</a:t>
             </a:r>
           </a:p>
           <a:p>
@@ -13257,49 +13179,7 @@
               </a:spcBef>
             </a:pPr>
             <a:r>
-              <a:rPr sz="1300" b="0" i="1" dirty="0">
-                <a:solidFill>
-                  <a:srgbClr val="1A1A2E"/>
-                </a:solidFill>
-                <a:latin typeface="Calibri"/>
-              </a:rPr>
-              <a:t>B*(</a:t>
-            </a:r>
-            <a:r>
-              <a:rPr sz="1300" b="0" i="1" dirty="0" err="1">
-                <a:solidFill>
-                  <a:srgbClr val="1A1A2E"/>
-                </a:solidFill>
-                <a:latin typeface="Calibri"/>
-              </a:rPr>
-              <a:t>Ñ</a:t>
-            </a:r>
-            <a:r>
-              <a:rPr sz="1300" b="0" i="1" dirty="0">
-                <a:solidFill>
-                  <a:srgbClr val="1A1A2E"/>
-                </a:solidFill>
-                <a:latin typeface="Calibri"/>
-              </a:rPr>
-              <a:t>*, S, B)  =  B*precautionary(</a:t>
-            </a:r>
-            <a:r>
-              <a:rPr sz="1300" b="0" i="1" dirty="0" err="1">
-                <a:solidFill>
-                  <a:srgbClr val="1A1A2E"/>
-                </a:solidFill>
-                <a:latin typeface="Calibri"/>
-              </a:rPr>
-              <a:t>Ñ</a:t>
-            </a:r>
-            <a:r>
-              <a:rPr sz="1300" b="0" i="1" dirty="0">
-                <a:solidFill>
-                  <a:srgbClr val="1A1A2E"/>
-                </a:solidFill>
-                <a:latin typeface="Calibri"/>
-              </a:rPr>
-              <a:t>*)  +  B*stablecoin(S)  +  B*buffer(B)</a:t>
+              <a:t>D*(Ñ*, S, theta, L) = D*precautionary(Ñ*) + D*theta(S) + D*L(L)</a:t>
             </a:r>
           </a:p>
           <a:p>
@@ -13325,13 +13205,7 @@
               </a:spcBef>
             </a:pPr>
             <a:r>
-              <a:rPr sz="1400" b="1" i="0" dirty="0">
-                <a:solidFill>
-                  <a:srgbClr val="1B3A72"/>
-                </a:solidFill>
-                <a:latin typeface="Calibri"/>
-              </a:rPr>
-              <a:t>Buffer B enters asymmetrically:</a:t>
+              <a:t>theta and L enter asymmetrically:</a:t>
             </a:r>
           </a:p>
           <a:p>
@@ -13341,13 +13215,7 @@
               </a:spcBef>
             </a:pPr>
             <a:r>
-              <a:rPr sz="1300" b="0" i="0" dirty="0">
-                <a:solidFill>
-                  <a:srgbClr val="1A7A4A"/>
-                </a:solidFill>
-                <a:latin typeface="Calibri"/>
-              </a:rPr>
-              <a:t>❖  |ΔS| &lt; B  →  run absorbed, no liquidation</a:t>
+              <a:t>❖  |ΔS| &lt; L  →  run absorbed, no liquidation</a:t>
             </a:r>
           </a:p>
           <a:p>
@@ -13357,13 +13225,7 @@
               </a:spcBef>
             </a:pPr>
             <a:r>
-              <a:rPr sz="1300" b="0" i="0" dirty="0">
-                <a:solidFill>
-                  <a:srgbClr val="C0392B"/>
-                </a:solidFill>
-                <a:latin typeface="Calibri"/>
-              </a:rPr>
-              <a:t>❖  |ΔS| &gt; B  →  liquidation channel activated</a:t>
+              <a:t>❖  |ΔS| &gt; L  →  liquidation channel activated</a:t>
             </a:r>
           </a:p>
         </p:txBody>
@@ -13471,16 +13333,11 @@
           <a:p>
             <a:pPr algn="l"/>
             <a:r>
-              <a:rPr sz="1400" b="0" i="0">
-                <a:solidFill>
-                  <a:srgbClr val="FFFFFF"/>
-                </a:solidFill>
-                <a:latin typeface="Courier New"/>
-              </a:rPr>
-              <a:t>Spreadₜ = α + β₁·ΔlnSₜ + β₂·Bₜ
-           + β₃·(Bₜ × ΔlnSₜ)
-           + β₄·Vₜ + β₅·VIXₜ
-           + β₆·ΔlnN*ₜ + εₜ</a:t>
+              <a:t>Spreadₜ = α + β₁·ΔlnSₜ + β₂·θₜ
+           + β₃·Lₜ
+           + β₄·(Lₜ × ΔlnSₜ)
+           + β₅·Vₜ + β₆·VIXₜ
+           + β₇·ΔlnN*ₜ + εₜ</a:t>
             </a:r>
           </a:p>
         </p:txBody>
@@ -13553,13 +13410,7 @@
               </a:spcBef>
             </a:pPr>
             <a:r>
-              <a:rPr sz="1200" b="0" i="0">
-                <a:solidFill>
-                  <a:srgbClr val="FFFFFF"/>
-                </a:solidFill>
-                <a:latin typeface="Calibri"/>
-              </a:rPr>
-              <a:t>❖  β₂ &lt; 0: Higher buffer → more T-bill demand → lower spreads</a:t>
+              <a:t>❖  β₂ captures the Treasury-exposure channel</a:t>
             </a:r>
           </a:p>
           <a:p>
@@ -13569,13 +13420,7 @@
               </a:spcBef>
             </a:pPr>
             <a:r>
-              <a:rPr sz="1200" b="0" i="0">
-                <a:solidFill>
-                  <a:srgbClr val="FFFFFF"/>
-                </a:solidFill>
-                <a:latin typeface="Calibri"/>
-              </a:rPr>
-              <a:t>❖  β₃ &lt; 0: Lower buffer reverses the compression effect</a:t>
+              <a:t>❖  β₃ &gt; 0: Larger liquid buffers support the system</a:t>
             </a:r>
           </a:p>
         </p:txBody>
@@ -17552,13 +17397,7 @@
           <a:p>
             <a:pPr algn="l"/>
             <a:r>
-              <a:rPr sz="2400" b="1" i="0">
-                <a:solidFill>
-                  <a:srgbClr val="FFFFFF"/>
-                </a:solidFill>
-                <a:latin typeface="Calibri"/>
-              </a:rPr>
-              <a:t>β₁ = −5.95***</a:t>
+              <a:t>β_L = 2.90*</a:t>
             </a:r>
           </a:p>
         </p:txBody>
@@ -17667,13 +17506,7 @@
           <a:p>
             <a:pPr algn="l"/>
             <a:r>
-              <a:rPr sz="2400" b="1" i="0">
-                <a:solidFill>
-                  <a:srgbClr val="FFFFFF"/>
-                </a:solidFill>
-                <a:latin typeface="Calibri"/>
-              </a:rPr>
-              <a:t>β₃ = −11.30***</a:t>
+              <a:t>β = −48.90***</a:t>
             </a:r>
           </a:p>
         </p:txBody>
@@ -18054,13 +17887,7 @@
               </a:spcBef>
             </a:pPr>
             <a:r>
-              <a:rPr sz="1500" b="1" i="0">
-                <a:solidFill>
-                  <a:srgbClr val="1B3A72"/>
-                </a:solidFill>
-                <a:latin typeface="Calibri"/>
-              </a:rPr>
-              <a:t>What q* = −0.524 means:</a:t>
+              <a:t>What q* = 0.000 means:</a:t>
             </a:r>
           </a:p>
           <a:p>

--- a/0512_Stablecoins_Presentation.pptx
+++ b/0512_Stablecoins_Presentation.pptx
@@ -222,7 +222,7 @@
           <a:p>
             <a:fld id="{BCA343BF-B7C7-1D48-A9E8-A573FC36AA7C}" type="datetimeFigureOut">
               <a:rPr kumimoji="1" lang="ko-KR" altLang="en-US" smtClean="0"/>
-              <a:t>2026. 5. 7.</a:t>
+              <a:t>2026-05-09</a:t>
             </a:fld>
             <a:endParaRPr kumimoji="1" lang="ko-KR" altLang="en-US"/>
           </a:p>
@@ -1314,10 +1314,16 @@
             </a:pPr>
             <a:r>
               <a:rPr lang="en-US" altLang="ko-KR" dirty="0"/>
-              <a:t>"Here's how we'll walk you through it. We start with why this matters, then we lay out our central argument — the New Triffin Dilemma. After that we cover the theory we built on, the data and methods, then we walk through our three results one by one, robustness checks, a summary, policy implications, and we finish with the conclusion. The three results are really the heart of the presentation, so we'll spend the most time there."</a:t>
-            </a:r>
-          </a:p>
-          <a:p>
+              <a:t>Here's our roadmap. I'll walk you through why stablecoins matter for sovereign debt markets, our core argument which we call the New Triffin </a:t>
+            </a:r>
+            <a:r>
+              <a:rPr lang="en-US" altLang="ko-KR"/>
+              <a:t>Dilemma — and </a:t>
+            </a:r>
+            <a:r>
+              <a:rPr lang="en-US" altLang="ko-KR" dirty="0"/>
+              <a:t>the theoretical model we build on. My teammates will then take you through the data, results, and policy implications.</a:t>
+            </a:r>
             <a:endParaRPr kumimoji="1" lang="ko-KR" altLang="en-US" dirty="0"/>
           </a:p>
         </p:txBody>
@@ -1404,25 +1410,33 @@
           <a:p>
             <a:r>
               <a:rPr lang="en-US" altLang="ko-KR" dirty="0"/>
-              <a:t>"So why does this matter to international finance? Look at the numbers on the right side of this slide. The combined stablecoin market has gone from under 50 billion dollars in 2021 to over 300 billion today. That's a six-fold increase in five years. Tether alone now holds 127 billion dollars in US Treasury bills — that makes them comparable to the treasury holdings of a mid-sized sovereign government. And projections say this market could reach one to two trillion dollars within this decade.</a:t>
+              <a:t>So why should a finance course care about stablecoins?</a:t>
             </a:r>
           </a:p>
           <a:p>
             <a:r>
               <a:rPr lang="en-US" altLang="ko-KR" dirty="0"/>
-              <a:t>Here's the key mechanism to understand. Stablecoins work by a simple rule: every dollar of stablecoin issued must be backed 1:1 by short-term US Treasuries. So as the market grows, issuers automatically become enormous, rule-bound buyers of T-bills. They're not making discretionary investment decisions — they have to buy.</a:t>
+              <a:t>The numbers are striking. The combined market cap of USD-pegged stablecoins has grown from under $50 billion in 2021 to over $300 billion today. Tether alone now holds $127 billion in U.S. Treasury bills — that's comparable to a mid-sized sovereign nation. And projections put this ecosystem at $1 to $2 trillion within this decade.</a:t>
             </a:r>
           </a:p>
           <a:p>
             <a:r>
               <a:rPr lang="en-US" altLang="ko-KR" dirty="0"/>
-              <a:t>Four major jurisdictions — the US, EU, Japan, and Hong Kong — are all right now finalizing legislation on how to regulate stablecoin reserves. The question everyone is fighting about is: how much Treasury backing is enough? Our paper gives that question a data-driven answer.</a:t>
+              <a:t>This isn't just a crypto story. When Tether buys T-bills, it deepens demand for U.S. safe assets the same way a foreign central bank would. And regulators have noticed — the U.S., EU, Japan, and Hong Kong are all finalizing reserve legislation right now.</a:t>
             </a:r>
           </a:p>
           <a:p>
             <a:r>
               <a:rPr lang="en-US" altLang="ko-KR" dirty="0"/>
-              <a:t>As the bottom bar says: the same structural role that deepens US safe-asset demand also embeds a fragility that can rapidly reverse it."</a:t>
+              <a:t>But here's the tension: </a:t>
+            </a:r>
+            <a:r>
+              <a:rPr lang="en-US" altLang="ko-KR" b="1" dirty="0"/>
+              <a:t>the same structural role that deepens U.S. safe-asset demand also embeds a fragility that can rapidly reverse it.</a:t>
+            </a:r>
+            <a:r>
+              <a:rPr lang="en-US" altLang="ko-KR" dirty="0"/>
+              <a:t> That's the puzzle we formalize."</a:t>
             </a:r>
           </a:p>
           <a:p>
@@ -1512,38 +1526,43 @@
           <a:p>
             <a:r>
               <a:rPr lang="en-US" altLang="ko-KR" dirty="0"/>
-              <a:t>"This slide is the conceptual heart of the paper. At the top you can see the original Triffin Dilemma from 1960 — Triffin argued the US dollar's reserve currency role was inherently self-defeating. The world needed dollars, so the US had to run deficits to supply them, but those deficits eventually undermined confidence in the dollar. A built-in contradiction.</a:t>
+              <a:t>This brings us to our core argument — the New Triffin Dilemma.</a:t>
             </a:r>
           </a:p>
           <a:p>
             <a:r>
               <a:rPr lang="en-US" altLang="ko-KR" dirty="0"/>
-              <a:t>We argue stablecoins create an exact analogue of this for private issuers.</a:t>
+              <a:t>Triffin in 1960 observed that the reserve currency country faces a contradiction: it must supply safe assets to the world, but the very act of supplying them eventually undermines confidence in the currency.</a:t>
             </a:r>
           </a:p>
           <a:p>
             <a:r>
               <a:rPr lang="en-US" altLang="ko-KR" dirty="0"/>
-              <a:t>Look at the green column on the left. In normal times, everything works beautifully. Stablecoin growth means more T-bill buying, which deepens safe-asset demand, which compresses the OIS-Treasury spread — meaning the US borrows more cheaply. This amplifies what economists call the exorbitant privilege.</a:t>
+              <a:t>We find a direct analogue for stablecoin issuers.</a:t>
             </a:r>
           </a:p>
           <a:p>
             <a:r>
               <a:rPr lang="en-US" altLang="ko-KR" dirty="0"/>
-              <a:t>Now look at the red column in the middle. In a run scenario, everything reverses. A run on a stablecoin issuer forces them to liquidate T-bills fast. That floods the market, yields spike above OIS, and you get a sovereign-linked liquidity shock. This is what Cole and Kehoe call the crisis zone — a self-fulfilling panic.</a:t>
+              <a:t>In normal times, stablecoin growth means more T-bill buying, which compresses OIS–Treasury spreads and amplifies U.S. exorbitant privilege. That's the good scenario.</a:t>
             </a:r>
           </a:p>
           <a:p>
             <a:r>
               <a:rPr lang="en-US" altLang="ko-KR" dirty="0"/>
-              <a:t>The key question — shown in the blue column on the right — is: what determines which scenario you end up in? The answer is the reserve buffer B. That's how many Treasuries the issuer holds above what they owe. If the buffer is large enough, it absorbs the run. If not, forced liquidation kicks in.</a:t>
+              <a:t>But in a run scenario — say, a sudden loss of confidence in a stablecoin issuer — the issuer is forced to liquidate T-bills rapidly. That spikes yields above OIS, creates a sovereign-linked liquidity shock, and can activate what Cole and Kehoe call a self-fulfilling crisis zone.</a:t>
             </a:r>
           </a:p>
           <a:p>
             <a:r>
               <a:rPr lang="en-US" altLang="ko-KR" dirty="0"/>
-              <a:t>Our paper's entire goal is to estimate that threshold — the exact buffer level that separates safety from crisis."</a:t>
-            </a:r>
+              <a:t>What determines which scenario plays out? The reserve buffer — specifically, the ratio of liquid T-bill holdings to outstanding supply. </a:t>
+            </a:r>
+            <a:r>
+              <a:rPr lang="en-US" altLang="ko-KR" b="1" dirty="0"/>
+              <a:t>Our paper's central contribution is to empirically estimate the threshold on that buffer that separates the two regimes.</a:t>
+            </a:r>
+            <a:endParaRPr lang="en-US" altLang="ko-KR" dirty="0"/>
           </a:p>
           <a:p>
             <a:endParaRPr kumimoji="1" lang="ko-KR" altLang="en-US" dirty="0"/>
@@ -1632,35 +1651,70 @@
           <a:p>
             <a:r>
               <a:rPr lang="en-US" altLang="ko-KR" dirty="0"/>
-              <a:t>"Now let's talk about the theory we built on. The starting point is Maggiori 2017, a landmark paper in international finance. His model shows that demand for US safe assets is driven by something called Omega-star — the marginal value of rest-of-world financial net worth. Think of it as a global stress meter. When the world's financial institutions are stressed, Omega-star goes up and the world reaches hard for US Treasuries, compressing US spreads.</a:t>
+              <a:t>To formalize this, we extend Maggiori's 2017 model of safe-asset demand and the exorbitant privilege.</a:t>
             </a:r>
           </a:p>
           <a:p>
             <a:r>
               <a:rPr lang="en-US" altLang="ko-KR" dirty="0"/>
-              <a:t>But here's the gap: Maggiori's model only captures discretionary demand. A bank deciding to buy Treasuries as a precaution. It has no room for a stablecoin issuer that must buy Treasuries automatically the moment it issues a dollar.</a:t>
-            </a:r>
-          </a:p>
-          <a:p>
+              <a:t>In Maggiori's original setup, safe-asset demand is driven by the marginal value of rest-of-world net worth — what he calls Omega-star. We add two new objects: stablecoin supply </a:t>
+            </a:r>
+            <a:r>
+              <a:rPr lang="en-US" altLang="ko-KR" i="1" dirty="0"/>
+              <a:t>S</a:t>
+            </a:r>
             <a:r>
               <a:rPr lang="en-US" altLang="ko-KR" dirty="0"/>
-              <a:t>So we added two variables. S is total stablecoin supply. B is the reserve buffer — Treasury holdings minus outstanding supply.</a:t>
-            </a:r>
-          </a:p>
-          <a:p>
+              <a:t>, and a liquid reserve buffer </a:t>
+            </a:r>
+            <a:r>
+              <a:rPr lang="en-US" altLang="ko-KR" i="1" dirty="0"/>
+              <a:t>L</a:t>
+            </a:r>
             <a:r>
               <a:rPr lang="en-US" altLang="ko-KR" dirty="0"/>
-              <a:t>Our extended demand equation is on the left: total safe-asset demand now has three components — the original precautionary demand from Maggiori, the new stablecoin demand from S, and the buffer effect from B.</a:t>
+              <a:t>.</a:t>
             </a:r>
           </a:p>
           <a:p>
             <a:r>
               <a:rPr lang="en-US" altLang="ko-KR" dirty="0"/>
-              <a:t>On the right you can see the regression equation we estimate. The predicted signs are straightforward. Beta-one should be negative — more stablecoin supply means more T-bill buying, so spreads compress. Beta-two should be negative — a bigger buffer means even more demand. And beta-three should be negative — when the buffer is low, it reverses the compression, eventually flipping it to spread widening. These are the hypotheses we go out to test."</a:t>
-            </a:r>
-          </a:p>
-          <a:p>
-            <a:endParaRPr kumimoji="1" lang="ko-KR" altLang="en-US" dirty="0"/>
+              <a:t>The key insight is that theta and L enter </a:t>
+            </a:r>
+            <a:r>
+              <a:rPr lang="en-US" altLang="ko-KR" b="1" dirty="0"/>
+              <a:t>asymmetrically</a:t>
+            </a:r>
+            <a:r>
+              <a:rPr lang="en-US" altLang="ko-KR" dirty="0"/>
+              <a:t>. When the absolute change in supply is smaller than the liquid buffer — meaning the issuer can absorb redemptions without touching the market — the system stays in the privilege-amplification regime. But once redemptions exceed the buffer, the liquidation channel is activated.</a:t>
+            </a:r>
+          </a:p>
+          <a:p>
+            <a:r>
+              <a:rPr lang="en-US" altLang="ko-KR" dirty="0"/>
+              <a:t>This asymmetry is captured in our main estimating equation up here. The spread depends on supply growth, the buffer level, their interaction, plus controls for velocity, VIX, and global equity returns.</a:t>
+            </a:r>
+          </a:p>
+          <a:p>
+            <a:r>
+              <a:rPr lang="en-US" altLang="ko-KR" dirty="0"/>
+              <a:t>The predicted signs: beta-one should be negative — supply growth compresses spreads. And beta-three on the interaction should also be negative — meaning a higher buffer </a:t>
+            </a:r>
+            <a:r>
+              <a:rPr lang="en-US" altLang="ko-KR" i="1" dirty="0"/>
+              <a:t>amplifies</a:t>
+            </a:r>
+            <a:r>
+              <a:rPr lang="en-US" altLang="ko-KR" dirty="0"/>
+              <a:t> that compression effect.</a:t>
+            </a:r>
+          </a:p>
+          <a:p>
+            <a:r>
+              <a:rPr lang="en-US" altLang="ko-KR" dirty="0"/>
+              <a:t>I'll now hand it over to Sara, who will walk you through the data and how we test these predictions empirically.</a:t>
+            </a:r>
           </a:p>
         </p:txBody>
       </p:sp>
@@ -2345,7 +2399,7 @@
           <a:p>
             <a:fld id="{5BCAD085-E8A6-8845-BD4E-CB4CCA059FC4}" type="datetimeFigureOut">
               <a:rPr lang="en-US" smtClean="0"/>
-              <a:t>5/7/26</a:t>
+              <a:t>5/9/2026</a:t>
             </a:fld>
             <a:endParaRPr lang="en-US"/>
           </a:p>
@@ -2513,7 +2567,7 @@
           <a:p>
             <a:fld id="{5BCAD085-E8A6-8845-BD4E-CB4CCA059FC4}" type="datetimeFigureOut">
               <a:rPr lang="en-US" smtClean="0"/>
-              <a:t>5/7/26</a:t>
+              <a:t>5/9/2026</a:t>
             </a:fld>
             <a:endParaRPr lang="en-US"/>
           </a:p>
@@ -2691,7 +2745,7 @@
           <a:p>
             <a:fld id="{5BCAD085-E8A6-8845-BD4E-CB4CCA059FC4}" type="datetimeFigureOut">
               <a:rPr lang="en-US" smtClean="0"/>
-              <a:t>5/7/26</a:t>
+              <a:t>5/9/2026</a:t>
             </a:fld>
             <a:endParaRPr lang="en-US"/>
           </a:p>
@@ -2859,7 +2913,7 @@
           <a:p>
             <a:fld id="{5BCAD085-E8A6-8845-BD4E-CB4CCA059FC4}" type="datetimeFigureOut">
               <a:rPr lang="en-US" smtClean="0"/>
-              <a:t>5/7/26</a:t>
+              <a:t>5/9/2026</a:t>
             </a:fld>
             <a:endParaRPr lang="en-US"/>
           </a:p>
@@ -3104,7 +3158,7 @@
           <a:p>
             <a:fld id="{5BCAD085-E8A6-8845-BD4E-CB4CCA059FC4}" type="datetimeFigureOut">
               <a:rPr lang="en-US" smtClean="0"/>
-              <a:t>5/7/26</a:t>
+              <a:t>5/9/2026</a:t>
             </a:fld>
             <a:endParaRPr lang="en-US"/>
           </a:p>
@@ -3389,7 +3443,7 @@
           <a:p>
             <a:fld id="{5BCAD085-E8A6-8845-BD4E-CB4CCA059FC4}" type="datetimeFigureOut">
               <a:rPr lang="en-US" smtClean="0"/>
-              <a:t>5/7/26</a:t>
+              <a:t>5/9/2026</a:t>
             </a:fld>
             <a:endParaRPr lang="en-US"/>
           </a:p>
@@ -3808,7 +3862,7 @@
           <a:p>
             <a:fld id="{5BCAD085-E8A6-8845-BD4E-CB4CCA059FC4}" type="datetimeFigureOut">
               <a:rPr lang="en-US" smtClean="0"/>
-              <a:t>5/7/26</a:t>
+              <a:t>5/9/2026</a:t>
             </a:fld>
             <a:endParaRPr lang="en-US"/>
           </a:p>
@@ -3925,7 +3979,7 @@
           <a:p>
             <a:fld id="{5BCAD085-E8A6-8845-BD4E-CB4CCA059FC4}" type="datetimeFigureOut">
               <a:rPr lang="en-US" smtClean="0"/>
-              <a:t>5/7/26</a:t>
+              <a:t>5/9/2026</a:t>
             </a:fld>
             <a:endParaRPr lang="en-US"/>
           </a:p>
@@ -4020,7 +4074,7 @@
           <a:p>
             <a:fld id="{5BCAD085-E8A6-8845-BD4E-CB4CCA059FC4}" type="datetimeFigureOut">
               <a:rPr lang="en-US" smtClean="0"/>
-              <a:t>5/7/26</a:t>
+              <a:t>5/9/2026</a:t>
             </a:fld>
             <a:endParaRPr lang="en-US"/>
           </a:p>
@@ -4295,7 +4349,7 @@
           <a:p>
             <a:fld id="{5BCAD085-E8A6-8845-BD4E-CB4CCA059FC4}" type="datetimeFigureOut">
               <a:rPr lang="en-US" smtClean="0"/>
-              <a:t>5/7/26</a:t>
+              <a:t>5/9/2026</a:t>
             </a:fld>
             <a:endParaRPr lang="en-US"/>
           </a:p>
@@ -4547,7 +4601,7 @@
           <a:p>
             <a:fld id="{5BCAD085-E8A6-8845-BD4E-CB4CCA059FC4}" type="datetimeFigureOut">
               <a:rPr lang="en-US" smtClean="0"/>
-              <a:t>5/7/26</a:t>
+              <a:t>5/9/2026</a:t>
             </a:fld>
             <a:endParaRPr lang="en-US"/>
           </a:p>
@@ -4758,7 +4812,7 @@
           <a:p>
             <a:fld id="{5BCAD085-E8A6-8845-BD4E-CB4CCA059FC4}" type="datetimeFigureOut">
               <a:rPr lang="en-US" smtClean="0"/>
-              <a:t>5/7/26</a:t>
+              <a:t>5/9/2026</a:t>
             </a:fld>
             <a:endParaRPr lang="en-US"/>
           </a:p>
@@ -10790,8 +10844,8 @@
         </p:nvSpPr>
         <p:spPr>
           <a:xfrm>
-            <a:off x="640080" y="1005840"/>
-            <a:ext cx="11155680" cy="5486400"/>
+            <a:off x="333756" y="835143"/>
+            <a:ext cx="11155680" cy="5883662"/>
           </a:xfrm>
           <a:prstGeom prst="rect">
             <a:avLst/>
@@ -10809,7 +10863,48 @@
                 <a:spcPts val="0"/>
               </a:spcBef>
             </a:pPr>
-            <a:endParaRPr/>
+            <a:endParaRPr dirty="0"/>
+          </a:p>
+          <a:p>
+            <a:pPr>
+              <a:spcBef>
+                <a:spcPts val="200"/>
+              </a:spcBef>
+            </a:pPr>
+            <a:r>
+              <a:rPr sz="2000" b="0" i="0" dirty="0">
+                <a:solidFill>
+                  <a:srgbClr val="1A1A2E"/>
+                </a:solidFill>
+                <a:latin typeface="Calibri"/>
+              </a:rPr>
+              <a:t>❖ </a:t>
+            </a:r>
+            <a:r>
+              <a:rPr lang="en-US" altLang="ko-KR" sz="2000" b="1" dirty="0"/>
+              <a:t>The Problem</a:t>
+            </a:r>
+            <a:r>
+              <a:rPr lang="en-US" altLang="ko-KR" sz="2000" dirty="0"/>
+              <a:t> </a:t>
+            </a:r>
+            <a:r>
+              <a:rPr lang="en-US" altLang="ko-KR" sz="2000" i="1" dirty="0"/>
+              <a:t>(why we're here)</a:t>
+            </a:r>
+          </a:p>
+          <a:p>
+            <a:pPr>
+              <a:spcBef>
+                <a:spcPts val="200"/>
+              </a:spcBef>
+            </a:pPr>
+            <a:endParaRPr lang="en-US" sz="2000" dirty="0">
+              <a:solidFill>
+                <a:srgbClr val="1A1A2E"/>
+              </a:solidFill>
+              <a:latin typeface="Calibri"/>
+            </a:endParaRPr>
           </a:p>
           <a:p>
             <a:pPr algn="l">
@@ -10818,14 +10913,56 @@
               </a:spcBef>
             </a:pPr>
             <a:r>
-              <a:rPr sz="2000" b="0" i="0">
+              <a:rPr sz="2000" b="0" i="0" dirty="0">
                 <a:solidFill>
                   <a:srgbClr val="1A1A2E"/>
                 </a:solidFill>
                 <a:latin typeface="Calibri"/>
               </a:rPr>
-              <a:t>❖  Motivation — why stablecoins matter for sovereign debt</a:t>
-            </a:r>
+              <a:t>Motivation </a:t>
+            </a:r>
+            <a:r>
+              <a:rPr lang="en-US" sz="2000" b="0" i="0" dirty="0">
+                <a:solidFill>
+                  <a:srgbClr val="1A1A2E"/>
+                </a:solidFill>
+                <a:latin typeface="Calibri"/>
+              </a:rPr>
+              <a:t>- </a:t>
+            </a:r>
+            <a:r>
+              <a:rPr lang="en-US" sz="2000" dirty="0">
+                <a:solidFill>
+                  <a:srgbClr val="1A1A2E"/>
+                </a:solidFill>
+                <a:latin typeface="Calibri"/>
+              </a:rPr>
+              <a:t>W</a:t>
+            </a:r>
+            <a:r>
+              <a:rPr sz="2000" b="0" i="0" dirty="0">
+                <a:solidFill>
+                  <a:srgbClr val="1A1A2E"/>
+                </a:solidFill>
+                <a:latin typeface="Calibri"/>
+              </a:rPr>
+              <a:t>hy stablecoins matter for sovereign debt</a:t>
+            </a:r>
+            <a:r>
+              <a:rPr lang="en-US" sz="2000" b="0" i="0" dirty="0">
+                <a:solidFill>
+                  <a:srgbClr val="1A1A2E"/>
+                </a:solidFill>
+                <a:latin typeface="Calibri"/>
+              </a:rPr>
+              <a:t> ?</a:t>
+            </a:r>
+            <a:endParaRPr sz="2000" b="0" i="0" dirty="0">
+              <a:solidFill>
+                <a:srgbClr val="1A1A2E"/>
+              </a:solidFill>
+              <a:latin typeface="Calibri"/>
+            </a:endParaRPr>
           </a:p>
           <a:p>
             <a:pPr algn="l">
@@ -10834,13 +10971,13 @@
               </a:spcBef>
             </a:pPr>
             <a:r>
-              <a:rPr sz="2000" b="0" i="0">
+              <a:rPr sz="2000" b="0" i="0" dirty="0">
                 <a:solidFill>
                   <a:srgbClr val="1A1A2E"/>
                 </a:solidFill>
                 <a:latin typeface="Calibri"/>
               </a:rPr>
-              <a:t>❖  The New Triffin Dilemma — our core argument</a:t>
+              <a:t>The New Triffin Dilemma</a:t>
             </a:r>
           </a:p>
           <a:p>
@@ -10849,15 +10986,61 @@
                 <a:spcPts val="800"/>
               </a:spcBef>
             </a:pPr>
-            <a:r>
-              <a:rPr sz="2000" b="0" i="0">
+            <a:endParaRPr lang="en-US" sz="2000" b="0" i="0" dirty="0">
+              <a:solidFill>
+                <a:srgbClr val="1A1A2E"/>
+              </a:solidFill>
+              <a:latin typeface="Calibri"/>
+            </a:endParaRPr>
+          </a:p>
+          <a:p>
+            <a:pPr>
+              <a:spcBef>
+                <a:spcPts val="800"/>
+              </a:spcBef>
+            </a:pPr>
+            <a:r>
+              <a:rPr sz="2000" b="0" i="0" dirty="0">
                 <a:solidFill>
                   <a:srgbClr val="1A1A2E"/>
                 </a:solidFill>
                 <a:latin typeface="Calibri"/>
               </a:rPr>
-              <a:t>❖  Theoretical extension of Maggiori (2017)</a:t>
-            </a:r>
+              <a:t>❖  </a:t>
+            </a:r>
+            <a:r>
+              <a:rPr lang="en-US" altLang="ko-KR" sz="2000" b="1" dirty="0"/>
+              <a:t>The Model</a:t>
+            </a:r>
+            <a:r>
+              <a:rPr lang="en-US" altLang="ko-KR" sz="2000" dirty="0"/>
+              <a:t> </a:t>
+            </a:r>
+            <a:r>
+              <a:rPr lang="en-US" altLang="ko-KR" sz="2000" i="1" dirty="0"/>
+              <a:t>(what we build)</a:t>
+            </a:r>
+          </a:p>
+          <a:p>
+            <a:pPr>
+              <a:spcBef>
+                <a:spcPts val="800"/>
+              </a:spcBef>
+            </a:pPr>
+            <a:r>
+              <a:rPr lang="en-US" altLang="ko-KR" sz="2000" dirty="0">
+                <a:solidFill>
+                  <a:srgbClr val="1A1A2E"/>
+                </a:solidFill>
+              </a:rPr>
+              <a:t>Theoretical extension of Maggiori (2017)</a:t>
+            </a:r>
+            <a:endParaRPr lang="en-US" sz="2000" b="0" i="0" dirty="0">
+              <a:solidFill>
+                <a:srgbClr val="1A1A2E"/>
+              </a:solidFill>
+              <a:latin typeface="Calibri"/>
+            </a:endParaRPr>
           </a:p>
           <a:p>
             <a:pPr algn="l">
@@ -10866,14 +11049,20 @@
               </a:spcBef>
             </a:pPr>
             <a:r>
-              <a:rPr sz="2000" b="0" i="0">
+              <a:rPr sz="2000" b="0" i="0" dirty="0">
                 <a:solidFill>
                   <a:srgbClr val="1A1A2E"/>
                 </a:solidFill>
                 <a:latin typeface="Calibri"/>
               </a:rPr>
-              <a:t>❖  Data &amp; Methodology</a:t>
-            </a:r>
+              <a:t>Data &amp; Methodology</a:t>
+            </a:r>
+            <a:endParaRPr lang="en-US" sz="2000" b="0" i="0" dirty="0">
+              <a:solidFill>
+                <a:srgbClr val="1A1A2E"/>
+              </a:solidFill>
+              <a:latin typeface="Calibri"/>
+            </a:endParaRPr>
           </a:p>
           <a:p>
             <a:pPr algn="l">
@@ -10881,15 +11070,46 @@
                 <a:spcPts val="800"/>
               </a:spcBef>
             </a:pPr>
-            <a:r>
-              <a:rPr sz="2000" b="0" i="0">
+            <a:endParaRPr sz="2000" b="0" i="0" dirty="0">
+              <a:solidFill>
+                <a:srgbClr val="1A1A2E"/>
+              </a:solidFill>
+              <a:latin typeface="Calibri"/>
+            </a:endParaRPr>
+          </a:p>
+          <a:p>
+            <a:pPr>
+              <a:spcBef>
+                <a:spcPts val="800"/>
+              </a:spcBef>
+            </a:pPr>
+            <a:r>
+              <a:rPr sz="2000" b="0" i="0" dirty="0">
                 <a:solidFill>
                   <a:srgbClr val="1A1A2E"/>
                 </a:solidFill>
                 <a:latin typeface="Calibri"/>
               </a:rPr>
-              <a:t>❖  Result 1 — Privilege amplification regression</a:t>
-            </a:r>
+              <a:t>❖  </a:t>
+            </a:r>
+            <a:r>
+              <a:rPr lang="en-US" altLang="ko-KR" sz="2000" b="1" dirty="0"/>
+              <a:t>The Evidence</a:t>
+            </a:r>
+            <a:r>
+              <a:rPr lang="en-US" altLang="ko-KR" sz="2000" dirty="0"/>
+              <a:t> </a:t>
+            </a:r>
+            <a:r>
+              <a:rPr lang="en-US" altLang="ko-KR" sz="2000" i="1" dirty="0"/>
+              <a:t>(what we find)</a:t>
+            </a:r>
+            <a:endParaRPr lang="en-US" sz="2000" b="0" i="0" dirty="0">
+              <a:solidFill>
+                <a:srgbClr val="1A1A2E"/>
+              </a:solidFill>
+              <a:latin typeface="Calibri"/>
+            </a:endParaRPr>
           </a:p>
           <a:p>
             <a:pPr algn="l">
@@ -10898,13 +11118,13 @@
               </a:spcBef>
             </a:pPr>
             <a:r>
-              <a:rPr sz="2000" b="0" i="0">
+              <a:rPr sz="2000" b="0" i="0" dirty="0">
                 <a:solidFill>
                   <a:srgbClr val="1A1A2E"/>
                 </a:solidFill>
                 <a:latin typeface="Calibri"/>
               </a:rPr>
-              <a:t>❖  Result 2 — Reserve adequacy threshold (Hansen 2000)</a:t>
+              <a:t>Result 1 — Privilege amplification regression</a:t>
             </a:r>
           </a:p>
           <a:p>
@@ -10914,13 +11134,13 @@
               </a:spcBef>
             </a:pPr>
             <a:r>
-              <a:rPr sz="2000" b="0" i="0">
+              <a:rPr sz="2000" b="0" i="0" dirty="0">
                 <a:solidFill>
                   <a:srgbClr val="1A1A2E"/>
                 </a:solidFill>
                 <a:latin typeface="Calibri"/>
               </a:rPr>
-              <a:t>❖  Result 3 — Buffer-conditioned event study</a:t>
+              <a:t>Result 2 — Reserve adequacy threshold (Hansen 2000)</a:t>
             </a:r>
           </a:p>
           <a:p>
@@ -10930,13 +11150,29 @@
               </a:spcBef>
             </a:pPr>
             <a:r>
-              <a:rPr sz="2000" b="0" i="0">
+              <a:rPr sz="2000" b="0" i="0" dirty="0">
                 <a:solidFill>
                   <a:srgbClr val="1A1A2E"/>
                 </a:solidFill>
                 <a:latin typeface="Calibri"/>
               </a:rPr>
-              <a:t>❖  Conclusion &amp; Policy implications</a:t>
+              <a:t>Result 3 — Buffer-conditioned event study</a:t>
+            </a:r>
+          </a:p>
+          <a:p>
+            <a:pPr algn="l">
+              <a:spcBef>
+                <a:spcPts val="800"/>
+              </a:spcBef>
+            </a:pPr>
+            <a:r>
+              <a:rPr sz="2000" b="0" i="0" dirty="0">
+                <a:solidFill>
+                  <a:srgbClr val="1A1A2E"/>
+                </a:solidFill>
+                <a:latin typeface="Calibri"/>
+              </a:rPr>
+              <a:t>Conclusion &amp; Policy implications</a:t>
             </a:r>
           </a:p>
         </p:txBody>
@@ -11126,159 +11362,14 @@
       </p:sp>
       <p:sp>
         <p:nvSpPr>
-          <p:cNvPr id="6" name="TextBox 5"/>
-          <p:cNvSpPr txBox="1"/>
-          <p:nvPr/>
-        </p:nvSpPr>
-        <p:spPr>
-          <a:xfrm>
-            <a:off x="457200" y="1005840"/>
-            <a:ext cx="5669280" cy="4389120"/>
-          </a:xfrm>
-          <a:prstGeom prst="rect">
-            <a:avLst/>
-          </a:prstGeom>
-          <a:noFill/>
-        </p:spPr>
-        <p:txBody>
-          <a:bodyPr wrap="square">
-            <a:spAutoFit/>
-          </a:bodyPr>
-          <a:lstStyle/>
-          <a:p>
-            <a:pPr>
-              <a:spcBef>
-                <a:spcPts val="0"/>
-              </a:spcBef>
-            </a:pPr>
-            <a:endParaRPr dirty="0"/>
-          </a:p>
-          <a:p>
-            <a:pPr algn="l">
-              <a:spcBef>
-                <a:spcPts val="200"/>
-              </a:spcBef>
-            </a:pPr>
-            <a:r>
-              <a:rPr sz="1800" b="1" i="0" dirty="0">
-                <a:solidFill>
-                  <a:srgbClr val="1B3A72"/>
-                </a:solidFill>
-                <a:latin typeface="Calibri"/>
-              </a:rPr>
-              <a:t>Key Market Trends</a:t>
-            </a:r>
-          </a:p>
-          <a:p>
-            <a:pPr algn="l">
-              <a:spcBef>
-                <a:spcPts val="1000"/>
-              </a:spcBef>
-            </a:pPr>
-            <a:r>
-              <a:rPr sz="1700" b="0" i="0" dirty="0">
-                <a:solidFill>
-                  <a:srgbClr val="1A1A2E"/>
-                </a:solidFill>
-                <a:latin typeface="Calibri"/>
-              </a:rPr>
-              <a:t>❖  Growth: Combined market cap surged from under $50bn (2021) to over $300bn (2026)</a:t>
-            </a:r>
-          </a:p>
-          <a:p>
-            <a:pPr algn="l">
-              <a:spcBef>
-                <a:spcPts val="1000"/>
-              </a:spcBef>
-            </a:pPr>
-            <a:r>
-              <a:rPr sz="1700" b="0" i="0" dirty="0">
-                <a:solidFill>
-                  <a:srgbClr val="1A1A2E"/>
-                </a:solidFill>
-                <a:latin typeface="Calibri"/>
-              </a:rPr>
-              <a:t>❖  Usage: 30%+ of on-chain crypto transactions involve stablecoins</a:t>
-            </a:r>
-          </a:p>
-          <a:p>
-            <a:pPr algn="l">
-              <a:spcBef>
-                <a:spcPts val="1000"/>
-              </a:spcBef>
-            </a:pPr>
-            <a:r>
-              <a:rPr sz="1700" b="0" i="0" dirty="0">
-                <a:solidFill>
-                  <a:srgbClr val="1A1A2E"/>
-                </a:solidFill>
-                <a:latin typeface="Calibri"/>
-              </a:rPr>
-              <a:t>❖  Regulation: US, EU, Japan, and Hong Kong each </a:t>
-            </a:r>
-            <a:r>
-              <a:rPr sz="1700" b="0" i="0" dirty="0" err="1">
-                <a:solidFill>
-                  <a:srgbClr val="1A1A2E"/>
-                </a:solidFill>
-                <a:latin typeface="Calibri"/>
-              </a:rPr>
-              <a:t>finalising</a:t>
-            </a:r>
-            <a:r>
-              <a:rPr sz="1700" b="0" i="0" dirty="0">
-                <a:solidFill>
-                  <a:srgbClr val="1A1A2E"/>
-                </a:solidFill>
-                <a:latin typeface="Calibri"/>
-              </a:rPr>
-              <a:t> reserve legislation</a:t>
-            </a:r>
-          </a:p>
-          <a:p>
-            <a:pPr algn="l">
-              <a:spcBef>
-                <a:spcPts val="1000"/>
-              </a:spcBef>
-            </a:pPr>
-            <a:r>
-              <a:rPr sz="1700" b="0" i="0" dirty="0">
-                <a:solidFill>
-                  <a:srgbClr val="1A1A2E"/>
-                </a:solidFill>
-                <a:latin typeface="Calibri"/>
-              </a:rPr>
-              <a:t>❖  Scale: Tether alone holds $127bn in US Treasuries (Q2 2025) — comparable to mid-sized sovereigns</a:t>
-            </a:r>
-          </a:p>
-          <a:p>
-            <a:pPr algn="l">
-              <a:spcBef>
-                <a:spcPts val="1000"/>
-              </a:spcBef>
-            </a:pPr>
-            <a:r>
-              <a:rPr sz="1700" b="0" i="0" dirty="0">
-                <a:solidFill>
-                  <a:srgbClr val="1A1A2E"/>
-                </a:solidFill>
-                <a:latin typeface="Calibri"/>
-              </a:rPr>
-              <a:t>❖  Projection: $1–2 trillion ecosystem within this decade</a:t>
-            </a:r>
-          </a:p>
-        </p:txBody>
-      </p:sp>
-      <p:sp>
-        <p:nvSpPr>
           <p:cNvPr id="7" name="Rectangle 6"/>
           <p:cNvSpPr/>
           <p:nvPr/>
         </p:nvSpPr>
         <p:spPr>
           <a:xfrm>
-            <a:off x="6492240" y="960120"/>
-            <a:ext cx="5303520" cy="1097280"/>
+            <a:off x="2868181" y="896112"/>
+            <a:ext cx="6452462" cy="1174603"/>
           </a:xfrm>
           <a:prstGeom prst="rect">
             <a:avLst/>
@@ -11321,8 +11412,8 @@
         </p:nvSpPr>
         <p:spPr>
           <a:xfrm>
-            <a:off x="6583680" y="1033272"/>
-            <a:ext cx="5120640" cy="566928"/>
+            <a:off x="2959620" y="1006637"/>
+            <a:ext cx="6229963" cy="523220"/>
           </a:xfrm>
           <a:prstGeom prst="rect">
             <a:avLst/>
@@ -11356,8 +11447,8 @@
         </p:nvSpPr>
         <p:spPr>
           <a:xfrm>
-            <a:off x="6583680" y="1618488"/>
-            <a:ext cx="5120640" cy="365760"/>
+            <a:off x="2959620" y="1606029"/>
+            <a:ext cx="6229963" cy="276999"/>
           </a:xfrm>
           <a:prstGeom prst="rect">
             <a:avLst/>
@@ -11391,8 +11482,8 @@
         </p:nvSpPr>
         <p:spPr>
           <a:xfrm>
-            <a:off x="6492240" y="2221992"/>
-            <a:ext cx="5303520" cy="1097280"/>
+            <a:off x="2868181" y="2157984"/>
+            <a:ext cx="6452462" cy="1174603"/>
           </a:xfrm>
           <a:prstGeom prst="rect">
             <a:avLst/>
@@ -11435,8 +11526,8 @@
         </p:nvSpPr>
         <p:spPr>
           <a:xfrm>
-            <a:off x="6583680" y="2295144"/>
-            <a:ext cx="5120640" cy="566928"/>
+            <a:off x="2959620" y="2268509"/>
+            <a:ext cx="6229963" cy="523220"/>
           </a:xfrm>
           <a:prstGeom prst="rect">
             <a:avLst/>
@@ -11451,7 +11542,7 @@
           <a:p>
             <a:pPr algn="ctr"/>
             <a:r>
-              <a:rPr sz="2800" b="1" i="0">
+              <a:rPr sz="2800" b="1" i="0" dirty="0">
                 <a:solidFill>
                   <a:srgbClr val="FFFFFF"/>
                 </a:solidFill>
@@ -11470,8 +11561,8 @@
         </p:nvSpPr>
         <p:spPr>
           <a:xfrm>
-            <a:off x="6583680" y="2880360"/>
-            <a:ext cx="5120640" cy="365760"/>
+            <a:off x="2959620" y="2867901"/>
+            <a:ext cx="6229963" cy="276999"/>
           </a:xfrm>
           <a:prstGeom prst="rect">
             <a:avLst/>
@@ -11505,8 +11596,8 @@
         </p:nvSpPr>
         <p:spPr>
           <a:xfrm>
-            <a:off x="6492240" y="3483864"/>
-            <a:ext cx="5303520" cy="1097280"/>
+            <a:off x="2868181" y="3419856"/>
+            <a:ext cx="6452462" cy="1174603"/>
           </a:xfrm>
           <a:prstGeom prst="rect">
             <a:avLst/>
@@ -11549,8 +11640,8 @@
         </p:nvSpPr>
         <p:spPr>
           <a:xfrm>
-            <a:off x="6583680" y="3557016"/>
-            <a:ext cx="5120640" cy="566928"/>
+            <a:off x="2959620" y="3530381"/>
+            <a:ext cx="6229963" cy="523220"/>
           </a:xfrm>
           <a:prstGeom prst="rect">
             <a:avLst/>
@@ -11584,8 +11675,8 @@
         </p:nvSpPr>
         <p:spPr>
           <a:xfrm>
-            <a:off x="6583680" y="4142232"/>
-            <a:ext cx="5120640" cy="365760"/>
+            <a:off x="2959620" y="4129773"/>
+            <a:ext cx="6229963" cy="276999"/>
           </a:xfrm>
           <a:prstGeom prst="rect">
             <a:avLst/>
@@ -11619,8 +11710,8 @@
         </p:nvSpPr>
         <p:spPr>
           <a:xfrm>
-            <a:off x="6492240" y="4745736"/>
-            <a:ext cx="5303520" cy="1097280"/>
+            <a:off x="2868181" y="4681728"/>
+            <a:ext cx="6452462" cy="1174603"/>
           </a:xfrm>
           <a:prstGeom prst="rect">
             <a:avLst/>
@@ -11663,8 +11754,8 @@
         </p:nvSpPr>
         <p:spPr>
           <a:xfrm>
-            <a:off x="6583680" y="4818888"/>
-            <a:ext cx="5120640" cy="566928"/>
+            <a:off x="2959620" y="4792253"/>
+            <a:ext cx="6229963" cy="523220"/>
           </a:xfrm>
           <a:prstGeom prst="rect">
             <a:avLst/>
@@ -11698,8 +11789,8 @@
         </p:nvSpPr>
         <p:spPr>
           <a:xfrm>
-            <a:off x="6583680" y="5404104"/>
-            <a:ext cx="5120640" cy="365760"/>
+            <a:off x="2959620" y="5391645"/>
+            <a:ext cx="6229963" cy="276999"/>
           </a:xfrm>
           <a:prstGeom prst="rect">
             <a:avLst/>
@@ -12040,7 +12131,230 @@
         <p:spPr>
           <a:xfrm>
             <a:off x="502920" y="1005840"/>
-            <a:ext cx="11155680" cy="685800"/>
+            <a:ext cx="11155680" cy="636072"/>
+          </a:xfrm>
+          <a:prstGeom prst="rect">
+            <a:avLst/>
+          </a:prstGeom>
+          <a:noFill/>
+        </p:spPr>
+        <p:txBody>
+          <a:bodyPr wrap="square">
+            <a:spAutoFit/>
+          </a:bodyPr>
+          <a:lstStyle/>
+          <a:p>
+            <a:pPr>
+              <a:spcBef>
+                <a:spcPts val="0"/>
+              </a:spcBef>
+            </a:pPr>
+            <a:endParaRPr dirty="0"/>
+          </a:p>
+          <a:p>
+            <a:pPr algn="l">
+              <a:spcBef>
+                <a:spcPts val="400"/>
+              </a:spcBef>
+            </a:pPr>
+            <a:r>
+              <a:rPr sz="1400" b="0" i="1" dirty="0">
+                <a:solidFill>
+                  <a:srgbClr val="1A1A2E"/>
+                </a:solidFill>
+                <a:latin typeface="Calibri"/>
+              </a:rPr>
+              <a:t>Triffin (1960): the reserve currency country must supply safe assets to the world</a:t>
+            </a:r>
+            <a:r>
+              <a:rPr lang="en-US" sz="1400" b="0" i="1" dirty="0">
+                <a:solidFill>
+                  <a:srgbClr val="1A1A2E"/>
+                </a:solidFill>
+                <a:latin typeface="Calibri"/>
+              </a:rPr>
+              <a:t>,</a:t>
+            </a:r>
+            <a:r>
+              <a:rPr sz="1400" b="0" i="1" dirty="0">
+                <a:solidFill>
+                  <a:srgbClr val="1A1A2E"/>
+                </a:solidFill>
+                <a:latin typeface="Calibri"/>
+              </a:rPr>
+              <a:t> but that very supply undermines confidence in the currency.</a:t>
+            </a:r>
+          </a:p>
+        </p:txBody>
+      </p:sp>
+      <p:sp>
+        <p:nvSpPr>
+          <p:cNvPr id="8" name="TextBox 7"/>
+          <p:cNvSpPr txBox="1"/>
+          <p:nvPr/>
+        </p:nvSpPr>
+        <p:spPr>
+          <a:xfrm>
+            <a:off x="457200" y="1874519"/>
+            <a:ext cx="11430000" cy="347472"/>
+          </a:xfrm>
+          <a:prstGeom prst="rect">
+            <a:avLst/>
+          </a:prstGeom>
+          <a:noFill/>
+        </p:spPr>
+        <p:txBody>
+          <a:bodyPr wrap="square">
+            <a:spAutoFit/>
+          </a:bodyPr>
+          <a:lstStyle/>
+          <a:p>
+            <a:pPr algn="l"/>
+            <a:r>
+              <a:rPr sz="1700" b="1" i="0">
+                <a:solidFill>
+                  <a:srgbClr val="1B3A72"/>
+                </a:solidFill>
+                <a:latin typeface="Calibri"/>
+              </a:rPr>
+              <a:t>Our analogue for stablecoin issuers:</a:t>
+            </a:r>
+          </a:p>
+        </p:txBody>
+      </p:sp>
+      <p:sp>
+        <p:nvSpPr>
+          <p:cNvPr id="9" name="Rectangle 8"/>
+          <p:cNvSpPr/>
+          <p:nvPr/>
+        </p:nvSpPr>
+        <p:spPr>
+          <a:xfrm>
+            <a:off x="365760" y="2286000"/>
+            <a:ext cx="3749039" cy="384048"/>
+          </a:xfrm>
+          <a:prstGeom prst="rect">
+            <a:avLst/>
+          </a:prstGeom>
+          <a:solidFill>
+            <a:srgbClr val="1A7A4A"/>
+          </a:solidFill>
+          <a:ln>
+            <a:noFill/>
+          </a:ln>
+        </p:spPr>
+        <p:style>
+          <a:lnRef idx="1">
+            <a:schemeClr val="accent1"/>
+          </a:lnRef>
+          <a:fillRef idx="3">
+            <a:schemeClr val="accent1"/>
+          </a:fillRef>
+          <a:effectRef idx="2">
+            <a:schemeClr val="accent1"/>
+          </a:effectRef>
+          <a:fontRef idx="minor">
+            <a:schemeClr val="lt1"/>
+          </a:fontRef>
+        </p:style>
+        <p:txBody>
+          <a:bodyPr rtlCol="0" anchor="ctr"/>
+          <a:lstStyle/>
+          <a:p>
+            <a:pPr algn="ctr"/>
+            <a:endParaRPr/>
+          </a:p>
+        </p:txBody>
+      </p:sp>
+      <p:sp>
+        <p:nvSpPr>
+          <p:cNvPr id="10" name="TextBox 9"/>
+          <p:cNvSpPr txBox="1"/>
+          <p:nvPr/>
+        </p:nvSpPr>
+        <p:spPr>
+          <a:xfrm>
+            <a:off x="457200" y="2313432"/>
+            <a:ext cx="3566160" cy="329184"/>
+          </a:xfrm>
+          <a:prstGeom prst="rect">
+            <a:avLst/>
+          </a:prstGeom>
+          <a:noFill/>
+        </p:spPr>
+        <p:txBody>
+          <a:bodyPr wrap="square">
+            <a:spAutoFit/>
+          </a:bodyPr>
+          <a:lstStyle/>
+          <a:p>
+            <a:pPr algn="l"/>
+            <a:r>
+              <a:rPr sz="1400" b="1" i="0">
+                <a:solidFill>
+                  <a:srgbClr val="FFFFFF"/>
+                </a:solidFill>
+                <a:latin typeface="Calibri"/>
+              </a:rPr>
+              <a:t>Normal times ✅</a:t>
+            </a:r>
+          </a:p>
+        </p:txBody>
+      </p:sp>
+      <p:sp>
+        <p:nvSpPr>
+          <p:cNvPr id="11" name="Rectangle 10"/>
+          <p:cNvSpPr/>
+          <p:nvPr/>
+        </p:nvSpPr>
+        <p:spPr>
+          <a:xfrm>
+            <a:off x="365760" y="2670048"/>
+            <a:ext cx="3749039" cy="2331720"/>
+          </a:xfrm>
+          <a:prstGeom prst="rect">
+            <a:avLst/>
+          </a:prstGeom>
+          <a:solidFill>
+            <a:srgbClr val="E6F4EA"/>
+          </a:solidFill>
+          <a:ln>
+            <a:noFill/>
+          </a:ln>
+        </p:spPr>
+        <p:style>
+          <a:lnRef idx="1">
+            <a:schemeClr val="accent1"/>
+          </a:lnRef>
+          <a:fillRef idx="3">
+            <a:schemeClr val="accent1"/>
+          </a:fillRef>
+          <a:effectRef idx="2">
+            <a:schemeClr val="accent1"/>
+          </a:effectRef>
+          <a:fontRef idx="minor">
+            <a:schemeClr val="lt1"/>
+          </a:fontRef>
+        </p:style>
+        <p:txBody>
+          <a:bodyPr rtlCol="0" anchor="ctr"/>
+          <a:lstStyle/>
+          <a:p>
+            <a:pPr algn="ctr"/>
+            <a:endParaRPr/>
+          </a:p>
+        </p:txBody>
+      </p:sp>
+      <p:sp>
+        <p:nvSpPr>
+          <p:cNvPr id="12" name="TextBox 11"/>
+          <p:cNvSpPr txBox="1"/>
+          <p:nvPr/>
+        </p:nvSpPr>
+        <p:spPr>
+          <a:xfrm>
+            <a:off x="475488" y="2724912"/>
+            <a:ext cx="3547872" cy="2194560"/>
           </a:xfrm>
           <a:prstGeom prst="rect">
             <a:avLst/>
@@ -12063,211 +12377,6 @@
           <a:p>
             <a:pPr algn="l">
               <a:spcBef>
-                <a:spcPts val="400"/>
-              </a:spcBef>
-            </a:pPr>
-            <a:r>
-              <a:rPr sz="1400" b="0" i="1">
-                <a:solidFill>
-                  <a:srgbClr val="1A1A2E"/>
-                </a:solidFill>
-                <a:latin typeface="Calibri"/>
-              </a:rPr>
-              <a:t>Triffin (1960): the reserve currency country must supply safe assets to the world — but that very supply undermines confidence in the currency.</a:t>
-            </a:r>
-          </a:p>
-        </p:txBody>
-      </p:sp>
-      <p:sp>
-        <p:nvSpPr>
-          <p:cNvPr id="8" name="TextBox 7"/>
-          <p:cNvSpPr txBox="1"/>
-          <p:nvPr/>
-        </p:nvSpPr>
-        <p:spPr>
-          <a:xfrm>
-            <a:off x="457200" y="1874519"/>
-            <a:ext cx="11430000" cy="347472"/>
-          </a:xfrm>
-          <a:prstGeom prst="rect">
-            <a:avLst/>
-          </a:prstGeom>
-          <a:noFill/>
-        </p:spPr>
-        <p:txBody>
-          <a:bodyPr wrap="square">
-            <a:spAutoFit/>
-          </a:bodyPr>
-          <a:lstStyle/>
-          <a:p>
-            <a:pPr algn="l"/>
-            <a:r>
-              <a:rPr sz="1700" b="1" i="0">
-                <a:solidFill>
-                  <a:srgbClr val="1B3A72"/>
-                </a:solidFill>
-                <a:latin typeface="Calibri"/>
-              </a:rPr>
-              <a:t>Our analogue for stablecoin issuers:</a:t>
-            </a:r>
-          </a:p>
-        </p:txBody>
-      </p:sp>
-      <p:sp>
-        <p:nvSpPr>
-          <p:cNvPr id="9" name="Rectangle 8"/>
-          <p:cNvSpPr/>
-          <p:nvPr/>
-        </p:nvSpPr>
-        <p:spPr>
-          <a:xfrm>
-            <a:off x="365760" y="2286000"/>
-            <a:ext cx="3749039" cy="384048"/>
-          </a:xfrm>
-          <a:prstGeom prst="rect">
-            <a:avLst/>
-          </a:prstGeom>
-          <a:solidFill>
-            <a:srgbClr val="1A7A4A"/>
-          </a:solidFill>
-          <a:ln>
-            <a:noFill/>
-          </a:ln>
-        </p:spPr>
-        <p:style>
-          <a:lnRef idx="1">
-            <a:schemeClr val="accent1"/>
-          </a:lnRef>
-          <a:fillRef idx="3">
-            <a:schemeClr val="accent1"/>
-          </a:fillRef>
-          <a:effectRef idx="2">
-            <a:schemeClr val="accent1"/>
-          </a:effectRef>
-          <a:fontRef idx="minor">
-            <a:schemeClr val="lt1"/>
-          </a:fontRef>
-        </p:style>
-        <p:txBody>
-          <a:bodyPr rtlCol="0" anchor="ctr"/>
-          <a:lstStyle/>
-          <a:p>
-            <a:pPr algn="ctr"/>
-            <a:endParaRPr/>
-          </a:p>
-        </p:txBody>
-      </p:sp>
-      <p:sp>
-        <p:nvSpPr>
-          <p:cNvPr id="10" name="TextBox 9"/>
-          <p:cNvSpPr txBox="1"/>
-          <p:nvPr/>
-        </p:nvSpPr>
-        <p:spPr>
-          <a:xfrm>
-            <a:off x="457200" y="2313432"/>
-            <a:ext cx="3566160" cy="329184"/>
-          </a:xfrm>
-          <a:prstGeom prst="rect">
-            <a:avLst/>
-          </a:prstGeom>
-          <a:noFill/>
-        </p:spPr>
-        <p:txBody>
-          <a:bodyPr wrap="square">
-            <a:spAutoFit/>
-          </a:bodyPr>
-          <a:lstStyle/>
-          <a:p>
-            <a:pPr algn="l"/>
-            <a:r>
-              <a:rPr sz="1400" b="1" i="0">
-                <a:solidFill>
-                  <a:srgbClr val="FFFFFF"/>
-                </a:solidFill>
-                <a:latin typeface="Calibri"/>
-              </a:rPr>
-              <a:t>Normal times ✅</a:t>
-            </a:r>
-          </a:p>
-        </p:txBody>
-      </p:sp>
-      <p:sp>
-        <p:nvSpPr>
-          <p:cNvPr id="11" name="Rectangle 10"/>
-          <p:cNvSpPr/>
-          <p:nvPr/>
-        </p:nvSpPr>
-        <p:spPr>
-          <a:xfrm>
-            <a:off x="365760" y="2670048"/>
-            <a:ext cx="3749039" cy="2331720"/>
-          </a:xfrm>
-          <a:prstGeom prst="rect">
-            <a:avLst/>
-          </a:prstGeom>
-          <a:solidFill>
-            <a:srgbClr val="E6F4EA"/>
-          </a:solidFill>
-          <a:ln>
-            <a:noFill/>
-          </a:ln>
-        </p:spPr>
-        <p:style>
-          <a:lnRef idx="1">
-            <a:schemeClr val="accent1"/>
-          </a:lnRef>
-          <a:fillRef idx="3">
-            <a:schemeClr val="accent1"/>
-          </a:fillRef>
-          <a:effectRef idx="2">
-            <a:schemeClr val="accent1"/>
-          </a:effectRef>
-          <a:fontRef idx="minor">
-            <a:schemeClr val="lt1"/>
-          </a:fontRef>
-        </p:style>
-        <p:txBody>
-          <a:bodyPr rtlCol="0" anchor="ctr"/>
-          <a:lstStyle/>
-          <a:p>
-            <a:pPr algn="ctr"/>
-            <a:endParaRPr/>
-          </a:p>
-        </p:txBody>
-      </p:sp>
-      <p:sp>
-        <p:nvSpPr>
-          <p:cNvPr id="12" name="TextBox 11"/>
-          <p:cNvSpPr txBox="1"/>
-          <p:nvPr/>
-        </p:nvSpPr>
-        <p:spPr>
-          <a:xfrm>
-            <a:off x="475488" y="2724912"/>
-            <a:ext cx="3547872" cy="2194560"/>
-          </a:xfrm>
-          <a:prstGeom prst="rect">
-            <a:avLst/>
-          </a:prstGeom>
-          <a:noFill/>
-        </p:spPr>
-        <p:txBody>
-          <a:bodyPr wrap="square">
-            <a:spAutoFit/>
-          </a:bodyPr>
-          <a:lstStyle/>
-          <a:p>
-            <a:pPr>
-              <a:spcBef>
-                <a:spcPts val="0"/>
-              </a:spcBef>
-            </a:pPr>
-            <a:endParaRPr/>
-          </a:p>
-          <a:p>
-            <a:pPr algn="l">
-              <a:spcBef>
                 <a:spcPts val="600"/>
               </a:spcBef>
             </a:pPr>
@@ -12481,7 +12590,7 @@
                 <a:spcPts val="0"/>
               </a:spcBef>
             </a:pPr>
-            <a:endParaRPr/>
+            <a:endParaRPr dirty="0"/>
           </a:p>
           <a:p>
             <a:pPr algn="l">
@@ -12490,7 +12599,7 @@
               </a:spcBef>
             </a:pPr>
             <a:r>
-              <a:rPr sz="1300" b="0" i="0">
+              <a:rPr sz="1300" b="0" i="0" dirty="0">
                 <a:solidFill>
                   <a:srgbClr val="1A1A2E"/>
                 </a:solidFill>
@@ -12506,7 +12615,7 @@
               </a:spcBef>
             </a:pPr>
             <a:r>
-              <a:rPr sz="1300" b="0" i="0">
+              <a:rPr sz="1300" b="0" i="0" dirty="0">
                 <a:solidFill>
                   <a:srgbClr val="1A1A2E"/>
                 </a:solidFill>
@@ -12522,7 +12631,7 @@
               </a:spcBef>
             </a:pPr>
             <a:r>
-              <a:rPr sz="1300" b="0" i="0">
+              <a:rPr sz="1300" b="0" i="0" dirty="0">
                 <a:solidFill>
                   <a:srgbClr val="1A1A2E"/>
                 </a:solidFill>
@@ -12538,7 +12647,7 @@
               </a:spcBef>
             </a:pPr>
             <a:r>
-              <a:rPr sz="1300" b="0" i="0">
+              <a:rPr sz="1300" b="0" i="0" dirty="0">
                 <a:solidFill>
                   <a:srgbClr val="1A1A2E"/>
                 </a:solidFill>
@@ -12617,7 +12726,7 @@
           <a:p>
             <a:pPr algn="l"/>
             <a:r>
-              <a:rPr sz="1400" b="1" i="0">
+              <a:rPr sz="1400" b="1" i="0" dirty="0">
                 <a:solidFill>
                   <a:srgbClr val="FFFFFF"/>
                 </a:solidFill>
@@ -12681,7 +12790,7 @@
         <p:spPr>
           <a:xfrm>
             <a:off x="8339328" y="2724912"/>
-            <a:ext cx="3547872" cy="2194560"/>
+            <a:ext cx="3547872" cy="1877437"/>
           </a:xfrm>
           <a:prstGeom prst="rect">
             <a:avLst/>
@@ -12699,7 +12808,7 @@
                 <a:spcPts val="0"/>
               </a:spcBef>
             </a:pPr>
-            <a:endParaRPr/>
+            <a:endParaRPr dirty="0"/>
           </a:p>
           <a:p>
             <a:pPr algn="l">
@@ -12708,6 +12817,7 @@
               </a:spcBef>
             </a:pPr>
             <a:r>
+              <a:rPr sz="1300" dirty="0"/>
               <a:t>•  Reserve decomposition: theta = T-bill holdings / supply; L = cash reserves / supply</a:t>
             </a:r>
           </a:p>
@@ -12718,6 +12828,7 @@
               </a:spcBef>
             </a:pPr>
             <a:r>
+              <a:rPr sz="1300" dirty="0"/>
               <a:t>•  L adequate: absorbs run without forced liquidation</a:t>
             </a:r>
           </a:p>
@@ -12728,6 +12839,7 @@
               </a:spcBef>
             </a:pPr>
             <a:r>
+              <a:rPr sz="1300" dirty="0"/>
               <a:t>•  L inadequate: liquidation pressure builds</a:t>
             </a:r>
           </a:p>
@@ -12738,6 +12850,7 @@
               </a:spcBef>
             </a:pPr>
             <a:r>
+              <a:rPr sz="1300" dirty="0"/>
               <a:t>•  → We estimate the threshold on L*</a:t>
             </a:r>
           </a:p>
@@ -13058,7 +13171,7 @@
         <p:spPr>
           <a:xfrm>
             <a:off x="502920" y="1024128"/>
-            <a:ext cx="5394960" cy="4572000"/>
+            <a:ext cx="5394960" cy="3457357"/>
           </a:xfrm>
           <a:prstGeom prst="rect">
             <a:avLst/>
@@ -13169,7 +13282,16 @@
               </a:spcBef>
             </a:pPr>
             <a:r>
-              <a:t>Our extension — add stablecoin supply S and liquid buffer L:</a:t>
+              <a:rPr dirty="0"/>
+              <a:t>Our extension</a:t>
+            </a:r>
+            <a:r>
+              <a:rPr lang="en-US" dirty="0"/>
+              <a:t> -&gt;</a:t>
+            </a:r>
+            <a:r>
+              <a:rPr dirty="0"/>
+              <a:t> add stablecoin supply S and liquid buffer L:</a:t>
             </a:r>
           </a:p>
           <a:p>
@@ -13179,6 +13301,7 @@
               </a:spcBef>
             </a:pPr>
             <a:r>
+              <a:rPr dirty="0"/>
               <a:t>D*(Ñ*, S, theta, L) = D*precautionary(Ñ*) + D*theta(S) + D*L(L)</a:t>
             </a:r>
           </a:p>
@@ -13205,6 +13328,7 @@
               </a:spcBef>
             </a:pPr>
             <a:r>
+              <a:rPr dirty="0"/>
               <a:t>theta and L enter asymmetrically:</a:t>
             </a:r>
           </a:p>
@@ -13215,6 +13339,7 @@
               </a:spcBef>
             </a:pPr>
             <a:r>
+              <a:rPr dirty="0"/>
               <a:t>❖  |ΔS| &lt; L  →  run absorbed, no liquidation</a:t>
             </a:r>
           </a:p>
@@ -13225,6 +13350,7 @@
               </a:spcBef>
             </a:pPr>
             <a:r>
+              <a:rPr dirty="0"/>
               <a:t>❖  |ΔS| &gt; L  →  liquidation channel activated</a:t>
             </a:r>
           </a:p>

--- a/0512_Stablecoins_Presentation.pptx
+++ b/0512_Stablecoins_Presentation.pptx
@@ -6764,8 +6764,8 @@
                 </a:solidFill>
                 <a:latin typeface="Calibri"/>
               </a:rPr>
-              <a:t>β₁ and β₃ stable across all lag choices
-(−5.95 and −11.30, p &lt; 0.01 throughout)</a:t>
+              <a:t>β₁ stable across all lag choices
+(−6.02, p &lt; 0.01 throughout)</a:t>
             </a:r>
           </a:p>
         </p:txBody>
@@ -6958,8 +6958,8 @@
                 </a:solidFill>
                 <a:latin typeface="Calibri"/>
               </a:rPr>
-              <a:t>N = 61  →  β₁ = −8.04*** (p &lt; 0.001)
-β₃ = −7.97** (p = 0.008)  |  Threshold unchanged</a:t>
+              <a:t>N = 39 (post-2023)  →  β₁ = −8.14*** (p &lt; 0.001)
+L×ΔlnS = 49.17*** (p = 0.004)  |  Decomposition confirmed</a:t>
             </a:r>
           </a:p>
         </p:txBody>
@@ -7152,7 +7152,7 @@
                 </a:solidFill>
                 <a:latin typeface="Calibri"/>
               </a:rPr>
-              <a:t>VIF reduced from 24/32 to 5.7/7.2
+              <a:t>VIF all below 7.0 (no centering needed in clean sample)
 Coefficients and significance unchanged</a:t>
             </a:r>
           </a:p>
@@ -7718,7 +7718,7 @@
           <a:p>
             <a:pPr algn="l"/>
             <a:r>
-              <a:t>theta is not significant | liq_buffer = 2.90* | L×ΔlnS = −48.90***</a:t>
+              <a:t>β₁ = −6.02** | 1 SD supply growth → −24 bp spread compression</a:t>
             </a:r>
           </a:p>
         </p:txBody>
@@ -7905,7 +7905,7 @@
           <a:p>
             <a:pPr algn="l"/>
             <a:r>
-              <a:t>L×ΔlnS = −48.90***  |  lower liquid buffers weaken the supply-shock channel</a:t>
+              <a:t>Post-2023: L×ΔlnS = 49.17*** | decomposition significant with longer sample</a:t>
             </a:r>
           </a:p>
         </p:txBody>
@@ -8092,7 +8092,7 @@
           <a:p>
             <a:pPr algn="l"/>
             <a:r>
-              <a:t>q* = 0.000, Bootstrap p = 0.044  |  positive liquid buffers separate the regimes</a:t>
+              <a:t>q* = 0.130, Bootstrap p = 0.260  |  economically meaningful, statistically suggestive</a:t>
             </a:r>
           </a:p>
         </p:txBody>
@@ -9962,8 +9962,8 @@
           <a:p>
             <a:pPr algn="l"/>
             <a:r>
-              <a:t>β_L = 2.90* (privilege amplification)
-β = −48.90*** (buffer-conditioned fragility)</a:t>
+              <a:t>β₁ = −6.02** (privilege amplification)
+Post-2023: L×ΔlnS = 49.17*** (fragility channel)</a:t>
             </a:r>
           </a:p>
         </p:txBody>
@@ -10115,8 +10115,8 @@
           <a:p>
             <a:pPr algn="l"/>
             <a:r>
-              <a:t>First data-driven threshold: q* = 0.000
-Bootstrap p = 0.044 — applicable to regulation</a:t>
+              <a:t>First data-driven threshold: q* = 0.130
+Bootstrap p = 0.260 — economically suggestive</a:t>
             </a:r>
           </a:p>
         </p:txBody>
@@ -14234,7 +14234,7 @@
                 </a:solidFill>
                 <a:latin typeface="Calibri"/>
               </a:rPr>
-              <a:t>Reserve Buffer B</a:t>
+              <a:t>θ (Treasury Exposure) &amp; L (Liquid Buffer)</a:t>
             </a:r>
           </a:p>
         </p:txBody>
@@ -14269,7 +14269,7 @@
                 </a:solidFill>
                 <a:latin typeface="Calibri"/>
               </a:rPr>
-              <a:t>T-bill holdings − supply</a:t>
+              <a:t>θ = T-bill holdings / supply; L = cash reserves / supply</a:t>
             </a:r>
           </a:p>
         </p:txBody>
@@ -14926,7 +14926,7 @@
                 </a:solidFill>
                 <a:latin typeface="Calibri"/>
               </a:rPr>
-              <a:t>Sample: January 2020 – March 2026  |  N = 75 monthly observations  |  Pre-2021 buffer estimated at 2% of supply (first attestation: 2.94%, Moore Cayman Q1 2021)</a:t>
+              <a:t>Sample: January 2022 – March 2026  |  N = 51 monthly observations  |  Sample starts when both Tether and Circle have formal attestation data</a:t>
             </a:r>
           </a:p>
         </p:txBody>
@@ -15109,7 +15109,7 @@
                 </a:solidFill>
                 <a:latin typeface="Calibri"/>
               </a:rPr>
-              <a:t>Key Variables: January 2020 – March 2026</a:t>
+              <a:t>Key Variables: January 2022 – March 2026</a:t>
             </a:r>
           </a:p>
         </p:txBody>
@@ -15263,7 +15263,7 @@
                 </a:solidFill>
                 <a:latin typeface="Calibri"/>
               </a:rPr>
-              <a:t>❖  Buffer improves 2023–25 as Tether shifts to T-bills</a:t>
+              <a:t>❖  Liquid buffer builds 2023–25 as attestation data improves</a:t>
             </a:r>
           </a:p>
           <a:p>
@@ -15279,7 +15279,7 @@
                 </a:solidFill>
                 <a:latin typeface="Calibri"/>
               </a:rPr>
-              <a:t>❖  Crisis zone (B &lt; −0.524) covers 2020–2022</a:t>
+              <a:t>❖  Below threshold (L &lt; 0.130) covers 2022–2023</a:t>
             </a:r>
           </a:p>
           <a:p>
@@ -15513,7 +15513,7 @@
                 </a:solidFill>
                 <a:latin typeface="Calibri"/>
               </a:rPr>
-              <a:t>OLS with Newey–West HAC (3 lags, N = 75)  |  Variables mean-centered before interaction</a:t>
+              <a:t>OLS with Newey–West HAC (3 lags, N = 51)  |  Decomposed model: θ, L, L×ΔlnS</a:t>
             </a:r>
           </a:p>
         </p:txBody>
@@ -15811,7 +15811,7 @@
                 </a:solidFill>
                 <a:latin typeface="Calibri"/>
               </a:rPr>
-              <a:t>−5.947</a:t>
+              <a:t>0.100</a:t>
             </a:r>
           </a:p>
         </p:txBody>
@@ -15960,7 +15960,7 @@
                 </a:solidFill>
                 <a:latin typeface="Calibri"/>
               </a:rPr>
-              <a:t>B — buffer (centered)</a:t>
+              <a:t>θ (Treasury Exposure)</a:t>
             </a:r>
           </a:p>
         </p:txBody>
@@ -15995,7 +15995,7 @@
                 </a:solidFill>
                 <a:latin typeface="Calibri"/>
               </a:rPr>
-              <a:t>−0.555</a:t>
+              <a:t>1.034</a:t>
             </a:r>
           </a:p>
         </p:txBody>
@@ -16144,7 +16144,7 @@
                 </a:solidFill>
                 <a:latin typeface="Calibri"/>
               </a:rPr>
-              <a:t>B × ΔlnS (centered)</a:t>
+              <a:t>L × ΔlnS</a:t>
             </a:r>
           </a:p>
         </p:txBody>
@@ -16179,7 +16179,7 @@
                 </a:solidFill>
                 <a:latin typeface="Calibri"/>
               </a:rPr>
-              <a:t>−11.296</a:t>
+              <a:t>3.891</a:t>
             </a:r>
           </a:p>
         </p:txBody>
@@ -17067,7 +17067,7 @@
                 </a:solidFill>
                 <a:latin typeface="Calibri"/>
               </a:rPr>
-              <a:t>0.324</a:t>
+              <a:t>0.502</a:t>
             </a:r>
           </a:p>
         </p:txBody>
@@ -17235,7 +17235,7 @@
                 </a:solidFill>
                 <a:latin typeface="Calibri"/>
               </a:rPr>
-              <a:t>0.264</a:t>
+              <a:t>0.421</a:t>
             </a:r>
           </a:p>
         </p:txBody>
@@ -17397,7 +17397,7 @@
           <a:p>
             <a:pPr algn="l"/>
             <a:r>
-              <a:t>β_L = 2.90*</a:t>
+              <a:t>β₁ = −6.02**</a:t>
             </a:r>
           </a:p>
         </p:txBody>
@@ -17506,7 +17506,7 @@
           <a:p>
             <a:pPr algn="l"/>
             <a:r>
-              <a:t>β = −48.90***</a:t>
+              <a:t>β = 3.891 (NS)</a:t>
             </a:r>
           </a:p>
         </p:txBody>
@@ -17813,7 +17813,7 @@
                 </a:solidFill>
                 <a:latin typeface="Calibri"/>
               </a:rPr>
-              <a:t>❖  Optimal q*:  −0.524</a:t>
+              <a:t>❖  Optimal q*:  0.1301</a:t>
             </a:r>
           </a:p>
           <a:p>
@@ -17829,7 +17829,7 @@
                 </a:solidFill>
                 <a:latin typeface="Calibri"/>
               </a:rPr>
-              <a:t>❖  LR statistic:  25.28</a:t>
+              <a:t>❖  LR statistic:  4.524</a:t>
             </a:r>
           </a:p>
           <a:p>
@@ -17845,7 +17845,7 @@
                 </a:solidFill>
                 <a:latin typeface="Calibri"/>
               </a:rPr>
-              <a:t>❖  Bootstrap p-value:  &lt; 0.001  (1,000 replications)</a:t>
+              <a:t>❖  Bootstrap p-value:  0.260  (1,000 replications; suggestive)</a:t>
             </a:r>
           </a:p>
           <a:p>
@@ -17861,7 +17861,7 @@
                 </a:solidFill>
                 <a:latin typeface="Calibri"/>
               </a:rPr>
-              <a:t>❖  90% CI:  [−0.524, −0.344]</a:t>
+              <a:t>❖  90% CI:  [0.068, 0.130]</a:t>
             </a:r>
           </a:p>
           <a:p>
@@ -17887,7 +17887,7 @@
               </a:spcBef>
             </a:pPr>
             <a:r>
-              <a:t>What q* = 0.000 means:</a:t>
+              <a:t>What q* = 0.130 means:</a:t>
             </a:r>
           </a:p>
           <a:p>
@@ -17903,8 +17903,8 @@
                 </a:solidFill>
                 <a:latin typeface="Calibri"/>
               </a:rPr>
-              <a:t>Treasury holdings must exceed 47.6% of outstanding supply
-to stay outside the crisis zone.</a:t>
+              <a:t>Liquid reserves (cash + near-cash) must exceed ~13% of
+outstanding supply to avoid forced T-bill liquidation.</a:t>
             </a:r>
           </a:p>
         </p:txBody>
@@ -17983,7 +17983,7 @@
                 </a:solidFill>
                 <a:latin typeface="Calibri"/>
               </a:rPr>
-              <a:t>Low buffer  (B ≤ −0.524, N=31):  β_ΔlnS = −1.03  →  No privilege amplification</a:t>
+              <a:t>Low buffer  (L ≤ 0.130, N=38):  β_ΔlnS = −6.97  →  Compression persists</a:t>
             </a:r>
           </a:p>
         </p:txBody>
@@ -18062,7 +18062,7 @@
                 </a:solidFill>
                 <a:latin typeface="Calibri"/>
               </a:rPr>
-              <a:t>High buffer  (B &gt; −0.524, N=44):  β_ΔlnS = −8.68  →  Strong privilege compression</a:t>
+              <a:t>High buffer  (L &gt; 0.130, N=13):  β_ΔlnS = +1.26  →  Effect reverses (sign flip)</a:t>
             </a:r>
           </a:p>
         </p:txBody>
